--- a/Presentazione_Ski_Resorts.pptx
+++ b/Presentazione_Ski_Resorts.pptx
@@ -14,7 +14,6 @@
     <p:sldId id="262" r:id="rId13"/>
     <p:sldId id="263" r:id="rId14"/>
     <p:sldId id="264" r:id="rId15"/>
-    <p:sldId id="265" r:id="rId16"/>
     <p:sldId id="266" r:id="rId17"/>
     <p:sldId id="267" r:id="rId18"/>
   </p:sldIdLst>
@@ -3361,7 +3360,7 @@
                 </a:solidFill>
                 <a:latin typeface="Calibri"/>
               </a:rPr>
-              <a:t>Analisi svolta in R  ·  prezzi in euro</a:t>
+              <a:t>Analisi svolta in R  ·  prezzi in dollari (USD)</a:t>
             </a:r>
           </a:p>
         </p:txBody>
@@ -3401,889 +3400,6 @@
                 <a:latin typeface="Calibri"/>
               </a:rPr>
               <a:t>Alessandro Macchi</a:t>
-            </a:r>
-          </a:p>
-        </p:txBody>
-      </p:sp>
-    </p:spTree>
-  </p:cSld>
-  <p:clrMapOvr>
-    <a:masterClrMapping/>
-  </p:clrMapOvr>
-</p:sld>
-</file>
-
-<file path=ppt/slides/slide10.xml><?xml version="1.0" encoding="utf-8"?>
-<p:sld xmlns:a="http://schemas.openxmlformats.org/drawingml/2006/main" xmlns:p="http://schemas.openxmlformats.org/presentationml/2006/main" xmlns:r="http://schemas.openxmlformats.org/officeDocument/2006/relationships">
-  <p:cSld>
-    <p:spTree>
-      <p:nvGrpSpPr>
-        <p:cNvPr id="1" name=""/>
-        <p:cNvGrpSpPr/>
-        <p:nvPr/>
-      </p:nvGrpSpPr>
-      <p:grpSpPr/>
-      <p:sp>
-        <p:nvSpPr>
-          <p:cNvPr id="2" name="Rectangle 1"/>
-          <p:cNvSpPr/>
-          <p:nvPr/>
-        </p:nvSpPr>
-        <p:spPr>
-          <a:xfrm>
-            <a:off x="0" y="0"/>
-            <a:ext cx="12191695" cy="1143000"/>
-          </a:xfrm>
-          <a:prstGeom prst="rect">
-            <a:avLst/>
-          </a:prstGeom>
-          <a:solidFill>
-            <a:srgbClr val="1F3A5F"/>
-          </a:solidFill>
-          <a:ln>
-            <a:noFill/>
-          </a:ln>
-          <a:effectLst/>
-        </p:spPr>
-        <p:style>
-          <a:lnRef idx="1">
-            <a:schemeClr val="accent1"/>
-          </a:lnRef>
-          <a:fillRef idx="3">
-            <a:schemeClr val="accent1"/>
-          </a:fillRef>
-          <a:effectRef idx="2">
-            <a:schemeClr val="accent1"/>
-          </a:effectRef>
-          <a:fontRef idx="minor">
-            <a:schemeClr val="lt1"/>
-          </a:fontRef>
-        </p:style>
-        <p:txBody>
-          <a:bodyPr rtlCol="0" anchor="ctr"/>
-          <a:lstStyle/>
-          <a:p>
-            <a:pPr algn="ctr"/>
-          </a:p>
-        </p:txBody>
-      </p:sp>
-      <p:sp>
-        <p:nvSpPr>
-          <p:cNvPr id="3" name="Rectangle 2"/>
-          <p:cNvSpPr/>
-          <p:nvPr/>
-        </p:nvSpPr>
-        <p:spPr>
-          <a:xfrm>
-            <a:off x="0" y="1143000"/>
-            <a:ext cx="12191695" cy="50800"/>
-          </a:xfrm>
-          <a:prstGeom prst="rect">
-            <a:avLst/>
-          </a:prstGeom>
-          <a:solidFill>
-            <a:srgbClr val="2E86C1"/>
-          </a:solidFill>
-          <a:ln>
-            <a:noFill/>
-          </a:ln>
-          <a:effectLst/>
-        </p:spPr>
-        <p:style>
-          <a:lnRef idx="1">
-            <a:schemeClr val="accent1"/>
-          </a:lnRef>
-          <a:fillRef idx="3">
-            <a:schemeClr val="accent1"/>
-          </a:fillRef>
-          <a:effectRef idx="2">
-            <a:schemeClr val="accent1"/>
-          </a:effectRef>
-          <a:fontRef idx="minor">
-            <a:schemeClr val="lt1"/>
-          </a:fontRef>
-        </p:style>
-        <p:txBody>
-          <a:bodyPr rtlCol="0" anchor="ctr"/>
-          <a:lstStyle/>
-          <a:p>
-            <a:pPr algn="ctr"/>
-          </a:p>
-        </p:txBody>
-      </p:sp>
-      <p:sp>
-        <p:nvSpPr>
-          <p:cNvPr id="4" name="TextBox 3"/>
-          <p:cNvSpPr txBox="1"/>
-          <p:nvPr/>
-        </p:nvSpPr>
-        <p:spPr>
-          <a:xfrm>
-            <a:off x="548640" y="146304"/>
-            <a:ext cx="10972800" cy="320040"/>
-          </a:xfrm>
-          <a:prstGeom prst="rect">
-            <a:avLst/>
-          </a:prstGeom>
-          <a:noFill/>
-        </p:spPr>
-        <p:txBody>
-          <a:bodyPr wrap="square" anchor="t">
-            <a:spAutoFit/>
-          </a:bodyPr>
-          <a:lstStyle/>
-          <a:p>
-            <a:pPr algn="l">
-              <a:spcBef>
-                <a:spcPts val="0"/>
-              </a:spcBef>
-            </a:pPr>
-            <a:r>
-              <a:rPr sz="1300" b="1">
-                <a:solidFill>
-                  <a:srgbClr val="BFD9F0"/>
-                </a:solidFill>
-                <a:latin typeface="Calibri"/>
-              </a:rPr>
-              <a:t>COSA FARNE</a:t>
-            </a:r>
-          </a:p>
-        </p:txBody>
-      </p:sp>
-      <p:sp>
-        <p:nvSpPr>
-          <p:cNvPr id="5" name="TextBox 4"/>
-          <p:cNvSpPr txBox="1"/>
-          <p:nvPr/>
-        </p:nvSpPr>
-        <p:spPr>
-          <a:xfrm>
-            <a:off x="548640" y="420624"/>
-            <a:ext cx="11064240" cy="640080"/>
-          </a:xfrm>
-          <a:prstGeom prst="rect">
-            <a:avLst/>
-          </a:prstGeom>
-          <a:noFill/>
-        </p:spPr>
-        <p:txBody>
-          <a:bodyPr wrap="square" anchor="ctr">
-            <a:spAutoFit/>
-          </a:bodyPr>
-          <a:lstStyle/>
-          <a:p>
-            <a:pPr algn="l">
-              <a:spcBef>
-                <a:spcPts val="0"/>
-              </a:spcBef>
-            </a:pPr>
-            <a:r>
-              <a:rPr sz="3000" b="1">
-                <a:solidFill>
-                  <a:srgbClr val="FFFFFF"/>
-                </a:solidFill>
-                <a:latin typeface="Calibri"/>
-              </a:rPr>
-              <a:t>Indicazioni pratiche per chi deve decidere</a:t>
-            </a:r>
-          </a:p>
-        </p:txBody>
-      </p:sp>
-      <p:sp>
-        <p:nvSpPr>
-          <p:cNvPr id="6" name="Rectangle 5"/>
-          <p:cNvSpPr/>
-          <p:nvPr/>
-        </p:nvSpPr>
-        <p:spPr>
-          <a:xfrm>
-            <a:off x="548640" y="1463040"/>
-            <a:ext cx="11064240" cy="1481328"/>
-          </a:xfrm>
-          <a:prstGeom prst="rect">
-            <a:avLst/>
-          </a:prstGeom>
-          <a:solidFill>
-            <a:srgbClr val="EAF2F8"/>
-          </a:solidFill>
-          <a:ln>
-            <a:noFill/>
-          </a:ln>
-          <a:effectLst/>
-        </p:spPr>
-        <p:style>
-          <a:lnRef idx="1">
-            <a:schemeClr val="accent1"/>
-          </a:lnRef>
-          <a:fillRef idx="3">
-            <a:schemeClr val="accent1"/>
-          </a:fillRef>
-          <a:effectRef idx="2">
-            <a:schemeClr val="accent1"/>
-          </a:effectRef>
-          <a:fontRef idx="minor">
-            <a:schemeClr val="lt1"/>
-          </a:fontRef>
-        </p:style>
-        <p:txBody>
-          <a:bodyPr rtlCol="0" anchor="ctr"/>
-          <a:lstStyle/>
-          <a:p>
-            <a:pPr algn="ctr"/>
-          </a:p>
-        </p:txBody>
-      </p:sp>
-      <p:sp>
-        <p:nvSpPr>
-          <p:cNvPr id="7" name="Rectangle 6"/>
-          <p:cNvSpPr/>
-          <p:nvPr/>
-        </p:nvSpPr>
-        <p:spPr>
-          <a:xfrm>
-            <a:off x="548640" y="1463040"/>
-            <a:ext cx="109728" cy="1481328"/>
-          </a:xfrm>
-          <a:prstGeom prst="rect">
-            <a:avLst/>
-          </a:prstGeom>
-          <a:solidFill>
-            <a:srgbClr val="2E86C1"/>
-          </a:solidFill>
-          <a:ln>
-            <a:noFill/>
-          </a:ln>
-          <a:effectLst/>
-        </p:spPr>
-        <p:style>
-          <a:lnRef idx="1">
-            <a:schemeClr val="accent1"/>
-          </a:lnRef>
-          <a:fillRef idx="3">
-            <a:schemeClr val="accent1"/>
-          </a:fillRef>
-          <a:effectRef idx="2">
-            <a:schemeClr val="accent1"/>
-          </a:effectRef>
-          <a:fontRef idx="minor">
-            <a:schemeClr val="lt1"/>
-          </a:fontRef>
-        </p:style>
-        <p:txBody>
-          <a:bodyPr rtlCol="0" anchor="ctr"/>
-          <a:lstStyle/>
-          <a:p>
-            <a:pPr algn="ctr"/>
-          </a:p>
-        </p:txBody>
-      </p:sp>
-      <p:sp>
-        <p:nvSpPr>
-          <p:cNvPr id="8" name="TextBox 7"/>
-          <p:cNvSpPr txBox="1"/>
-          <p:nvPr/>
-        </p:nvSpPr>
-        <p:spPr>
-          <a:xfrm>
-            <a:off x="868680" y="1572768"/>
-            <a:ext cx="10424160" cy="365760"/>
-          </a:xfrm>
-          <a:prstGeom prst="rect">
-            <a:avLst/>
-          </a:prstGeom>
-          <a:noFill/>
-        </p:spPr>
-        <p:txBody>
-          <a:bodyPr wrap="square" anchor="t">
-            <a:spAutoFit/>
-          </a:bodyPr>
-          <a:lstStyle/>
-          <a:p>
-            <a:pPr algn="l">
-              <a:spcBef>
-                <a:spcPts val="0"/>
-              </a:spcBef>
-            </a:pPr>
-            <a:r>
-              <a:rPr sz="1550" b="1">
-                <a:solidFill>
-                  <a:srgbClr val="2E86C1"/>
-                </a:solidFill>
-                <a:latin typeface="Calibri"/>
-              </a:rPr>
-              <a:t>🎿  Se sei uno sciatore attento al budget</a:t>
-            </a:r>
-          </a:p>
-        </p:txBody>
-      </p:sp>
-      <p:sp>
-        <p:nvSpPr>
-          <p:cNvPr id="9" name="TextBox 8"/>
-          <p:cNvSpPr txBox="1"/>
-          <p:nvPr/>
-        </p:nvSpPr>
-        <p:spPr>
-          <a:xfrm>
-            <a:off x="868680" y="1965960"/>
-            <a:ext cx="10515600" cy="960120"/>
-          </a:xfrm>
-          <a:prstGeom prst="rect">
-            <a:avLst/>
-          </a:prstGeom>
-          <a:noFill/>
-        </p:spPr>
-        <p:txBody>
-          <a:bodyPr wrap="square" anchor="t">
-            <a:spAutoFit/>
-          </a:bodyPr>
-          <a:lstStyle/>
-          <a:p>
-            <a:pPr algn="l" lvl="1">
-              <a:spcBef>
-                <a:spcPts val="0"/>
-              </a:spcBef>
-              <a:spcAft>
-                <a:spcPts val="200"/>
-              </a:spcAft>
-            </a:pPr>
-            <a:r>
-              <a:rPr sz="1250" b="0">
-                <a:solidFill>
-                  <a:srgbClr val="333333"/>
-                </a:solidFill>
-                <a:latin typeface="Calibri"/>
-              </a:rPr>
-              <a:t>• Sciare in Europa o Asia costa molto meno che in Nord America</a:t>
-            </a:r>
-          </a:p>
-          <a:p>
-            <a:pPr algn="l" lvl="1">
-              <a:spcBef>
-                <a:spcPts val="0"/>
-              </a:spcBef>
-              <a:spcAft>
-                <a:spcPts val="200"/>
-              </a:spcAft>
-            </a:pPr>
-            <a:r>
-              <a:rPr sz="1250" b="0">
-                <a:solidFill>
-                  <a:srgbClr val="333333"/>
-                </a:solidFill>
-                <a:latin typeface="Calibri"/>
-              </a:rPr>
-              <a:t>• Le quote più alte si pagano: cerca comprensori più bassi per risparmiare</a:t>
-            </a:r>
-          </a:p>
-          <a:p>
-            <a:pPr algn="l" lvl="1">
-              <a:spcBef>
-                <a:spcPts val="0"/>
-              </a:spcBef>
-              <a:spcAft>
-                <a:spcPts val="200"/>
-              </a:spcAft>
-            </a:pPr>
-            <a:r>
-              <a:rPr sz="1250" b="0">
-                <a:solidFill>
-                  <a:srgbClr val="333333"/>
-                </a:solidFill>
-                <a:latin typeface="Calibri"/>
-              </a:rPr>
-              <a:t>• Non pagare per la “neve garantita”: non è ciò che alza il prezzo</a:t>
-            </a:r>
-          </a:p>
-        </p:txBody>
-      </p:sp>
-      <p:sp>
-        <p:nvSpPr>
-          <p:cNvPr id="10" name="Rectangle 9"/>
-          <p:cNvSpPr/>
-          <p:nvPr/>
-        </p:nvSpPr>
-        <p:spPr>
-          <a:xfrm>
-            <a:off x="548640" y="3063240"/>
-            <a:ext cx="11064240" cy="1481328"/>
-          </a:xfrm>
-          <a:prstGeom prst="rect">
-            <a:avLst/>
-          </a:prstGeom>
-          <a:solidFill>
-            <a:srgbClr val="EAF2F8"/>
-          </a:solidFill>
-          <a:ln>
-            <a:noFill/>
-          </a:ln>
-          <a:effectLst/>
-        </p:spPr>
-        <p:style>
-          <a:lnRef idx="1">
-            <a:schemeClr val="accent1"/>
-          </a:lnRef>
-          <a:fillRef idx="3">
-            <a:schemeClr val="accent1"/>
-          </a:fillRef>
-          <a:effectRef idx="2">
-            <a:schemeClr val="accent1"/>
-          </a:effectRef>
-          <a:fontRef idx="minor">
-            <a:schemeClr val="lt1"/>
-          </a:fontRef>
-        </p:style>
-        <p:txBody>
-          <a:bodyPr rtlCol="0" anchor="ctr"/>
-          <a:lstStyle/>
-          <a:p>
-            <a:pPr algn="ctr"/>
-          </a:p>
-        </p:txBody>
-      </p:sp>
-      <p:sp>
-        <p:nvSpPr>
-          <p:cNvPr id="11" name="Rectangle 10"/>
-          <p:cNvSpPr/>
-          <p:nvPr/>
-        </p:nvSpPr>
-        <p:spPr>
-          <a:xfrm>
-            <a:off x="548640" y="3063240"/>
-            <a:ext cx="109728" cy="1481328"/>
-          </a:xfrm>
-          <a:prstGeom prst="rect">
-            <a:avLst/>
-          </a:prstGeom>
-          <a:solidFill>
-            <a:srgbClr val="1E8B5A"/>
-          </a:solidFill>
-          <a:ln>
-            <a:noFill/>
-          </a:ln>
-          <a:effectLst/>
-        </p:spPr>
-        <p:style>
-          <a:lnRef idx="1">
-            <a:schemeClr val="accent1"/>
-          </a:lnRef>
-          <a:fillRef idx="3">
-            <a:schemeClr val="accent1"/>
-          </a:fillRef>
-          <a:effectRef idx="2">
-            <a:schemeClr val="accent1"/>
-          </a:effectRef>
-          <a:fontRef idx="minor">
-            <a:schemeClr val="lt1"/>
-          </a:fontRef>
-        </p:style>
-        <p:txBody>
-          <a:bodyPr rtlCol="0" anchor="ctr"/>
-          <a:lstStyle/>
-          <a:p>
-            <a:pPr algn="ctr"/>
-          </a:p>
-        </p:txBody>
-      </p:sp>
-      <p:sp>
-        <p:nvSpPr>
-          <p:cNvPr id="12" name="TextBox 11"/>
-          <p:cNvSpPr txBox="1"/>
-          <p:nvPr/>
-        </p:nvSpPr>
-        <p:spPr>
-          <a:xfrm>
-            <a:off x="868680" y="3172968"/>
-            <a:ext cx="10424160" cy="365760"/>
-          </a:xfrm>
-          <a:prstGeom prst="rect">
-            <a:avLst/>
-          </a:prstGeom>
-          <a:noFill/>
-        </p:spPr>
-        <p:txBody>
-          <a:bodyPr wrap="square" anchor="t">
-            <a:spAutoFit/>
-          </a:bodyPr>
-          <a:lstStyle/>
-          <a:p>
-            <a:pPr algn="l">
-              <a:spcBef>
-                <a:spcPts val="0"/>
-              </a:spcBef>
-            </a:pPr>
-            <a:r>
-              <a:rPr sz="1550" b="1">
-                <a:solidFill>
-                  <a:srgbClr val="1E8B5A"/>
-                </a:solidFill>
-                <a:latin typeface="Calibri"/>
-              </a:rPr>
-              <a:t>🏔️  Se gestisci o prezzi un comprensorio</a:t>
-            </a:r>
-          </a:p>
-        </p:txBody>
-      </p:sp>
-      <p:sp>
-        <p:nvSpPr>
-          <p:cNvPr id="13" name="TextBox 12"/>
-          <p:cNvSpPr txBox="1"/>
-          <p:nvPr/>
-        </p:nvSpPr>
-        <p:spPr>
-          <a:xfrm>
-            <a:off x="868680" y="3566160"/>
-            <a:ext cx="10515600" cy="960120"/>
-          </a:xfrm>
-          <a:prstGeom prst="rect">
-            <a:avLst/>
-          </a:prstGeom>
-          <a:noFill/>
-        </p:spPr>
-        <p:txBody>
-          <a:bodyPr wrap="square" anchor="t">
-            <a:spAutoFit/>
-          </a:bodyPr>
-          <a:lstStyle/>
-          <a:p>
-            <a:pPr algn="l" lvl="1">
-              <a:spcBef>
-                <a:spcPts val="0"/>
-              </a:spcBef>
-              <a:spcAft>
-                <a:spcPts val="200"/>
-              </a:spcAft>
-            </a:pPr>
-            <a:r>
-              <a:rPr sz="1250" b="0">
-                <a:solidFill>
-                  <a:srgbClr val="333333"/>
-                </a:solidFill>
-                <a:latin typeface="Calibri"/>
-              </a:rPr>
-              <a:t>• Posizione e altitudine fissano il tetto di prezzo realistico</a:t>
-            </a:r>
-          </a:p>
-          <a:p>
-            <a:pPr algn="l" lvl="1">
-              <a:spcBef>
-                <a:spcPts val="0"/>
-              </a:spcBef>
-              <a:spcAft>
-                <a:spcPts val="200"/>
-              </a:spcAft>
-            </a:pPr>
-            <a:r>
-              <a:rPr sz="1250" b="0">
-                <a:solidFill>
-                  <a:srgbClr val="333333"/>
-                </a:solidFill>
-                <a:latin typeface="Calibri"/>
-              </a:rPr>
-              <a:t>• Uno snowpark giustifica un piccolo sovrapprezzo; sci notturno e “baby-friendly” no</a:t>
-            </a:r>
-          </a:p>
-          <a:p>
-            <a:pPr algn="l" lvl="1">
-              <a:spcBef>
-                <a:spcPts val="0"/>
-              </a:spcBef>
-              <a:spcAft>
-                <a:spcPts val="200"/>
-              </a:spcAft>
-            </a:pPr>
-            <a:r>
-              <a:rPr sz="1250" b="0">
-                <a:solidFill>
-                  <a:srgbClr val="333333"/>
-                </a:solidFill>
-                <a:latin typeface="Calibri"/>
-              </a:rPr>
-              <a:t>• Investire in più impianti non si traduce automaticamente in prezzi più alti</a:t>
-            </a:r>
-          </a:p>
-        </p:txBody>
-      </p:sp>
-      <p:sp>
-        <p:nvSpPr>
-          <p:cNvPr id="14" name="Rectangle 13"/>
-          <p:cNvSpPr/>
-          <p:nvPr/>
-        </p:nvSpPr>
-        <p:spPr>
-          <a:xfrm>
-            <a:off x="548640" y="4663440"/>
-            <a:ext cx="11064240" cy="1481328"/>
-          </a:xfrm>
-          <a:prstGeom prst="rect">
-            <a:avLst/>
-          </a:prstGeom>
-          <a:solidFill>
-            <a:srgbClr val="EAF2F8"/>
-          </a:solidFill>
-          <a:ln>
-            <a:noFill/>
-          </a:ln>
-          <a:effectLst/>
-        </p:spPr>
-        <p:style>
-          <a:lnRef idx="1">
-            <a:schemeClr val="accent1"/>
-          </a:lnRef>
-          <a:fillRef idx="3">
-            <a:schemeClr val="accent1"/>
-          </a:fillRef>
-          <a:effectRef idx="2">
-            <a:schemeClr val="accent1"/>
-          </a:effectRef>
-          <a:fontRef idx="minor">
-            <a:schemeClr val="lt1"/>
-          </a:fontRef>
-        </p:style>
-        <p:txBody>
-          <a:bodyPr rtlCol="0" anchor="ctr"/>
-          <a:lstStyle/>
-          <a:p>
-            <a:pPr algn="ctr"/>
-          </a:p>
-        </p:txBody>
-      </p:sp>
-      <p:sp>
-        <p:nvSpPr>
-          <p:cNvPr id="15" name="Rectangle 14"/>
-          <p:cNvSpPr/>
-          <p:nvPr/>
-        </p:nvSpPr>
-        <p:spPr>
-          <a:xfrm>
-            <a:off x="548640" y="4663440"/>
-            <a:ext cx="109728" cy="1481328"/>
-          </a:xfrm>
-          <a:prstGeom prst="rect">
-            <a:avLst/>
-          </a:prstGeom>
-          <a:solidFill>
-            <a:srgbClr val="1F3A5F"/>
-          </a:solidFill>
-          <a:ln>
-            <a:noFill/>
-          </a:ln>
-          <a:effectLst/>
-        </p:spPr>
-        <p:style>
-          <a:lnRef idx="1">
-            <a:schemeClr val="accent1"/>
-          </a:lnRef>
-          <a:fillRef idx="3">
-            <a:schemeClr val="accent1"/>
-          </a:fillRef>
-          <a:effectRef idx="2">
-            <a:schemeClr val="accent1"/>
-          </a:effectRef>
-          <a:fontRef idx="minor">
-            <a:schemeClr val="lt1"/>
-          </a:fontRef>
-        </p:style>
-        <p:txBody>
-          <a:bodyPr rtlCol="0" anchor="ctr"/>
-          <a:lstStyle/>
-          <a:p>
-            <a:pPr algn="ctr"/>
-          </a:p>
-        </p:txBody>
-      </p:sp>
-      <p:sp>
-        <p:nvSpPr>
-          <p:cNvPr id="16" name="TextBox 15"/>
-          <p:cNvSpPr txBox="1"/>
-          <p:nvPr/>
-        </p:nvSpPr>
-        <p:spPr>
-          <a:xfrm>
-            <a:off x="868680" y="4773168"/>
-            <a:ext cx="10424160" cy="365760"/>
-          </a:xfrm>
-          <a:prstGeom prst="rect">
-            <a:avLst/>
-          </a:prstGeom>
-          <a:noFill/>
-        </p:spPr>
-        <p:txBody>
-          <a:bodyPr wrap="square" anchor="t">
-            <a:spAutoFit/>
-          </a:bodyPr>
-          <a:lstStyle/>
-          <a:p>
-            <a:pPr algn="l">
-              <a:spcBef>
-                <a:spcPts val="0"/>
-              </a:spcBef>
-            </a:pPr>
-            <a:r>
-              <a:rPr sz="1550" b="1">
-                <a:solidFill>
-                  <a:srgbClr val="1F3A5F"/>
-                </a:solidFill>
-                <a:latin typeface="Calibri"/>
-              </a:rPr>
-              <a:t>📊  Se sei un investitore o un ente del turismo</a:t>
-            </a:r>
-          </a:p>
-        </p:txBody>
-      </p:sp>
-      <p:sp>
-        <p:nvSpPr>
-          <p:cNvPr id="17" name="TextBox 16"/>
-          <p:cNvSpPr txBox="1"/>
-          <p:nvPr/>
-        </p:nvSpPr>
-        <p:spPr>
-          <a:xfrm>
-            <a:off x="868680" y="5166360"/>
-            <a:ext cx="10515600" cy="960120"/>
-          </a:xfrm>
-          <a:prstGeom prst="rect">
-            <a:avLst/>
-          </a:prstGeom>
-          <a:noFill/>
-        </p:spPr>
-        <p:txBody>
-          <a:bodyPr wrap="square" anchor="t">
-            <a:spAutoFit/>
-          </a:bodyPr>
-          <a:lstStyle/>
-          <a:p>
-            <a:pPr algn="l" lvl="1">
-              <a:spcBef>
-                <a:spcPts val="0"/>
-              </a:spcBef>
-              <a:spcAft>
-                <a:spcPts val="200"/>
-              </a:spcAft>
-            </a:pPr>
-            <a:r>
-              <a:rPr sz="1250" b="0">
-                <a:solidFill>
-                  <a:srgbClr val="333333"/>
-                </a:solidFill>
-                <a:latin typeface="Calibri"/>
-              </a:rPr>
-              <a:t>• Il mercato è guidato dalla geografia più che dai servizi</a:t>
-            </a:r>
-          </a:p>
-          <a:p>
-            <a:pPr algn="l" lvl="1">
-              <a:spcBef>
-                <a:spcPts val="0"/>
-              </a:spcBef>
-              <a:spcAft>
-                <a:spcPts val="200"/>
-              </a:spcAft>
-            </a:pPr>
-            <a:r>
-              <a:rPr sz="1250" b="0">
-                <a:solidFill>
-                  <a:srgbClr val="333333"/>
-                </a:solidFill>
-                <a:latin typeface="Calibri"/>
-              </a:rPr>
-              <a:t>• La ricchezza del Paese conta; il costo della vita locale molto meno</a:t>
-            </a:r>
-          </a:p>
-          <a:p>
-            <a:pPr algn="l" lvl="1">
-              <a:spcBef>
-                <a:spcPts val="0"/>
-              </a:spcBef>
-              <a:spcAft>
-                <a:spcPts val="200"/>
-              </a:spcAft>
-            </a:pPr>
-            <a:r>
-              <a:rPr sz="1250" b="0">
-                <a:solidFill>
-                  <a:srgbClr val="333333"/>
-                </a:solidFill>
-                <a:latin typeface="Calibri"/>
-              </a:rPr>
-              <a:t>• Attenzione: pochi dati per Oceania e Sud America</a:t>
-            </a:r>
-          </a:p>
-        </p:txBody>
-      </p:sp>
-      <p:sp>
-        <p:nvSpPr>
-          <p:cNvPr id="18" name="TextBox 17"/>
-          <p:cNvSpPr txBox="1"/>
-          <p:nvPr/>
-        </p:nvSpPr>
-        <p:spPr>
-          <a:xfrm>
-            <a:off x="548640" y="6446520"/>
-            <a:ext cx="7315200" cy="274320"/>
-          </a:xfrm>
-          <a:prstGeom prst="rect">
-            <a:avLst/>
-          </a:prstGeom>
-          <a:noFill/>
-        </p:spPr>
-        <p:txBody>
-          <a:bodyPr wrap="square" anchor="t">
-            <a:spAutoFit/>
-          </a:bodyPr>
-          <a:lstStyle/>
-          <a:p>
-            <a:pPr algn="l">
-              <a:spcBef>
-                <a:spcPts val="0"/>
-              </a:spcBef>
-            </a:pPr>
-            <a:r>
-              <a:rPr sz="900" b="0">
-                <a:solidFill>
-                  <a:srgbClr val="555555"/>
-                </a:solidFill>
-                <a:latin typeface="Calibri"/>
-              </a:rPr>
-              <a:t>Cosa determina il prezzo di uno skipass?</a:t>
-            </a:r>
-          </a:p>
-        </p:txBody>
-      </p:sp>
-      <p:sp>
-        <p:nvSpPr>
-          <p:cNvPr id="19" name="TextBox 18"/>
-          <p:cNvSpPr txBox="1"/>
-          <p:nvPr/>
-        </p:nvSpPr>
-        <p:spPr>
-          <a:xfrm>
-            <a:off x="10972800" y="6446520"/>
-            <a:ext cx="822960" cy="274320"/>
-          </a:xfrm>
-          <a:prstGeom prst="rect">
-            <a:avLst/>
-          </a:prstGeom>
-          <a:noFill/>
-        </p:spPr>
-        <p:txBody>
-          <a:bodyPr wrap="square" anchor="t">
-            <a:spAutoFit/>
-          </a:bodyPr>
-          <a:lstStyle/>
-          <a:p>
-            <a:pPr algn="r">
-              <a:spcBef>
-                <a:spcPts val="0"/>
-              </a:spcBef>
-            </a:pPr>
-            <a:r>
-              <a:rPr sz="900" b="0">
-                <a:solidFill>
-                  <a:srgbClr val="555555"/>
-                </a:solidFill>
-                <a:latin typeface="Calibri"/>
-              </a:rPr>
-              <a:t>9</a:t>
             </a:r>
           </a:p>
         </p:txBody>
@@ -5131,7 +4247,7 @@
                 </a:solidFill>
                 <a:latin typeface="Calibri"/>
               </a:rPr>
-              <a:t>PIL e costo della vita sono medie nazionali, non del singolo comprensorio.</a:t>
+              <a:t>Il PIL pro capite è una media nazionale, non del singolo comprensorio.</a:t>
             </a:r>
           </a:p>
         </p:txBody>
@@ -5375,7 +4491,7 @@
                 </a:solidFill>
                 <a:latin typeface="Calibri"/>
               </a:rPr>
-              <a:t>10</a:t>
+              <a:t>9</a:t>
             </a:r>
           </a:p>
         </p:txBody>
@@ -7009,7 +6125,7 @@
                 </a:solidFill>
                 <a:latin typeface="Calibri"/>
               </a:rPr>
-              <a:t>~50 €</a:t>
+              <a:t>~52 $</a:t>
             </a:r>
           </a:p>
         </p:txBody>
@@ -7175,7 +6291,7 @@
                 </a:solidFill>
                 <a:latin typeface="Calibri"/>
               </a:rPr>
-              <a:t>46 €</a:t>
+              <a:t>48 $</a:t>
             </a:r>
           </a:p>
         </p:txBody>
@@ -7341,7 +6457,7 @@
                 </a:solidFill>
                 <a:latin typeface="Calibri"/>
               </a:rPr>
-              <a:t>14 – 141 €</a:t>
+              <a:t>15 – 148 $</a:t>
             </a:r>
           </a:p>
         </p:txBody>
@@ -7441,7 +6557,7 @@
                 </a:solidFill>
                 <a:latin typeface="Calibri"/>
               </a:rPr>
-              <a:t>la maggior parte dei comprensori sta tra 30 e 60 €, ma una manciata di località premium tira su la media. La maggioranza dei dati riguarda l'Europa (360 su 499).</a:t>
+              <a:t>la maggior parte dei comprensori sta tra 32 e 63 $, ma una manciata di località premium tira su la media. La maggioranza dei dati riguarda l'Europa (360 su 499).</a:t>
             </a:r>
           </a:p>
         </p:txBody>
@@ -8473,7 +7589,7 @@
                 </a:solidFill>
                 <a:latin typeface="Calibri"/>
               </a:rPr>
-              <a:t>• Tra i più bassi e i più alti il divario arriva a ~40 €</a:t>
+              <a:t>• Tra i più bassi e i più alti il divario arriva a ~43 $</a:t>
             </a:r>
           </a:p>
         </p:txBody>
@@ -9245,7 +8361,7 @@
                 </a:solidFill>
                 <a:latin typeface="Calibri"/>
               </a:rPr>
-              <a:t>+36 €</a:t>
+              <a:t>+38 $</a:t>
             </a:r>
           </a:p>
           <a:p>
@@ -9283,7 +8399,7 @@
                 </a:solidFill>
                 <a:latin typeface="Calibri"/>
               </a:rPr>
-              <a:t>• Nord America in media ~36 € più dell'Europa</a:t>
+              <a:t>• Nord America in media ~38 $ più dell'Europa</a:t>
             </a:r>
           </a:p>
           <a:p>
@@ -9452,174 +8568,6 @@
                 <a:latin typeface="Calibri"/>
               </a:rPr>
               <a:t>• Nei Paesi con PIL pro capite più alto i prezzi salgono</a:t>
-            </a:r>
-          </a:p>
-        </p:txBody>
-      </p:sp>
-      <p:sp>
-        <p:nvSpPr>
-          <p:cNvPr id="14" name="Rectangle 13"/>
-          <p:cNvSpPr/>
-          <p:nvPr/>
-        </p:nvSpPr>
-        <p:spPr>
-          <a:xfrm>
-            <a:off x="548640" y="4434840"/>
-            <a:ext cx="5760720" cy="1234440"/>
-          </a:xfrm>
-          <a:prstGeom prst="rect">
-            <a:avLst/>
-          </a:prstGeom>
-          <a:solidFill>
-            <a:srgbClr val="EAF2F8"/>
-          </a:solidFill>
-          <a:ln>
-            <a:noFill/>
-          </a:ln>
-          <a:effectLst/>
-        </p:spPr>
-        <p:style>
-          <a:lnRef idx="1">
-            <a:schemeClr val="accent1"/>
-          </a:lnRef>
-          <a:fillRef idx="3">
-            <a:schemeClr val="accent1"/>
-          </a:fillRef>
-          <a:effectRef idx="2">
-            <a:schemeClr val="accent1"/>
-          </a:effectRef>
-          <a:fontRef idx="minor">
-            <a:schemeClr val="lt1"/>
-          </a:fontRef>
-        </p:style>
-        <p:txBody>
-          <a:bodyPr rtlCol="0" anchor="ctr"/>
-          <a:lstStyle/>
-          <a:p>
-            <a:pPr algn="ctr"/>
-          </a:p>
-        </p:txBody>
-      </p:sp>
-      <p:sp>
-        <p:nvSpPr>
-          <p:cNvPr id="15" name="Rectangle 14"/>
-          <p:cNvSpPr/>
-          <p:nvPr/>
-        </p:nvSpPr>
-        <p:spPr>
-          <a:xfrm>
-            <a:off x="548640" y="4434840"/>
-            <a:ext cx="109728" cy="1234440"/>
-          </a:xfrm>
-          <a:prstGeom prst="rect">
-            <a:avLst/>
-          </a:prstGeom>
-          <a:solidFill>
-            <a:srgbClr val="555555"/>
-          </a:solidFill>
-          <a:ln>
-            <a:noFill/>
-          </a:ln>
-          <a:effectLst/>
-        </p:spPr>
-        <p:style>
-          <a:lnRef idx="1">
-            <a:schemeClr val="accent1"/>
-          </a:lnRef>
-          <a:fillRef idx="3">
-            <a:schemeClr val="accent1"/>
-          </a:fillRef>
-          <a:effectRef idx="2">
-            <a:schemeClr val="accent1"/>
-          </a:effectRef>
-          <a:fontRef idx="minor">
-            <a:schemeClr val="lt1"/>
-          </a:fontRef>
-        </p:style>
-        <p:txBody>
-          <a:bodyPr rtlCol="0" anchor="ctr"/>
-          <a:lstStyle/>
-          <a:p>
-            <a:pPr algn="ctr"/>
-          </a:p>
-        </p:txBody>
-      </p:sp>
-      <p:sp>
-        <p:nvSpPr>
-          <p:cNvPr id="16" name="TextBox 15"/>
-          <p:cNvSpPr txBox="1"/>
-          <p:nvPr/>
-        </p:nvSpPr>
-        <p:spPr>
-          <a:xfrm>
-            <a:off x="841248" y="4599432"/>
-            <a:ext cx="5303520" cy="960120"/>
-          </a:xfrm>
-          <a:prstGeom prst="rect">
-            <a:avLst/>
-          </a:prstGeom>
-          <a:noFill/>
-        </p:spPr>
-        <p:txBody>
-          <a:bodyPr wrap="square" anchor="t">
-            <a:spAutoFit/>
-          </a:bodyPr>
-          <a:lstStyle/>
-          <a:p>
-            <a:pPr algn="l">
-              <a:spcBef>
-                <a:spcPts val="0"/>
-              </a:spcBef>
-              <a:spcAft>
-                <a:spcPts val="500"/>
-              </a:spcAft>
-            </a:pPr>
-            <a:r>
-              <a:rPr sz="1500" b="1">
-                <a:solidFill>
-                  <a:srgbClr val="555555"/>
-                </a:solidFill>
-                <a:latin typeface="Calibri"/>
-              </a:rPr>
-              <a:t>Il costo della vita locale, invece, no</a:t>
-            </a:r>
-          </a:p>
-          <a:p>
-            <a:pPr algn="l" lvl="1">
-              <a:spcBef>
-                <a:spcPts val="0"/>
-              </a:spcBef>
-              <a:spcAft>
-                <a:spcPts val="300"/>
-              </a:spcAft>
-            </a:pPr>
-            <a:r>
-              <a:rPr sz="1250" b="0">
-                <a:solidFill>
-                  <a:srgbClr val="333333"/>
-                </a:solidFill>
-                <a:latin typeface="Calibri"/>
-              </a:rPr>
-              <a:t>• Vivere in un Paese “caro” non significa skipass più caro</a:t>
-            </a:r>
-          </a:p>
-          <a:p>
-            <a:pPr algn="l" lvl="1">
-              <a:spcBef>
-                <a:spcPts val="0"/>
-              </a:spcBef>
-              <a:spcAft>
-                <a:spcPts val="300"/>
-              </a:spcAft>
-            </a:pPr>
-            <a:r>
-              <a:rPr sz="1250" b="0">
-                <a:solidFill>
-                  <a:srgbClr val="333333"/>
-                </a:solidFill>
-                <a:latin typeface="Calibri"/>
-              </a:rPr>
-              <a:t>• Conta la ricchezza, non il carovita</a:t>
             </a:r>
           </a:p>
         </p:txBody>
@@ -10047,7 +8995,7 @@
                 </a:solidFill>
                 <a:latin typeface="Calibri"/>
               </a:rPr>
-              <a:t>+9 €</a:t>
+              <a:t>+10 $</a:t>
             </a:r>
           </a:p>
         </p:txBody>
@@ -10252,7 +9200,7 @@
                 </a:solidFill>
                 <a:latin typeface="Calibri"/>
               </a:rPr>
-              <a:t>0 €</a:t>
+              <a:t>0 $</a:t>
             </a:r>
           </a:p>
         </p:txBody>
@@ -10457,7 +9405,7 @@
                 </a:solidFill>
                 <a:latin typeface="Calibri"/>
               </a:rPr>
-              <a:t>0 €</a:t>
+              <a:t>0 $</a:t>
             </a:r>
           </a:p>
         </p:txBody>
@@ -10662,7 +9610,7 @@
                 </a:solidFill>
                 <a:latin typeface="Calibri"/>
               </a:rPr>
-              <a:t>“+13 €”</a:t>
+              <a:t>“+14 $”</a:t>
             </a:r>
           </a:p>
         </p:txBody>
@@ -11839,7 +10787,7 @@
                 </a:solidFill>
                 <a:latin typeface="Calibri"/>
               </a:rPr>
-              <a:t>LA PROVA DEL NOVE</a:t>
+              <a:t>RIEPILOGO DELLE ANALISI</a:t>
             </a:r>
           </a:p>
         </p:txBody>
@@ -11878,21 +10826,21 @@
                 </a:solidFill>
                 <a:latin typeface="Calibri"/>
               </a:rPr>
-              <a:t>Guardando tutti i fattori insieme</a:t>
-            </a:r>
-          </a:p>
-        </p:txBody>
-      </p:sp>
-      <p:sp>
-        <p:nvSpPr>
-          <p:cNvPr id="6" name="TextBox 5"/>
+              <a:t>Tutti i fattori, ordinati per forza dell'effetto</a:t>
+            </a:r>
+          </a:p>
+        </p:txBody>
+      </p:sp>
+      <p:sp>
+        <p:nvSpPr>
+          <p:cNvPr id="17" name="TextBox 16"/>
           <p:cNvSpPr txBox="1"/>
           <p:nvPr/>
         </p:nvSpPr>
         <p:spPr>
           <a:xfrm>
-            <a:off x="548640" y="1371600"/>
-            <a:ext cx="11064240" cy="914400"/>
+            <a:off x="548640" y="6446520"/>
+            <a:ext cx="7315200" cy="274320"/>
           </a:xfrm>
           <a:prstGeom prst="rect">
             <a:avLst/>
@@ -11909,178 +10857,29 @@
               <a:spcBef>
                 <a:spcPts val="0"/>
               </a:spcBef>
-              <a:spcAft>
-                <a:spcPts val="500"/>
-              </a:spcAft>
             </a:pPr>
             <a:r>
-              <a:rPr sz="1400" b="0">
-                <a:solidFill>
-                  <a:srgbClr val="333333"/>
+              <a:rPr sz="900" b="0">
+                <a:solidFill>
+                  <a:srgbClr val="555555"/>
                 </a:solidFill>
                 <a:latin typeface="Calibri"/>
               </a:rPr>
-              <a:t>Un test bivariato guarda un fattore alla volta e può ingannare: il Nord America è più caro per la posizione, o perché quei comprensori sono anche più alti e grandi?</a:t>
-            </a:r>
-          </a:p>
-          <a:p>
-            <a:pPr algn="l">
-              <a:spcBef>
-                <a:spcPts val="0"/>
-              </a:spcBef>
-              <a:spcAft>
-                <a:spcPts val="0"/>
-              </a:spcAft>
-            </a:pPr>
-            <a:r>
-              <a:rPr sz="1400" b="1">
-                <a:solidFill>
-                  <a:srgbClr val="1F3A5F"/>
-                </a:solidFill>
-                <a:latin typeface="Calibri"/>
-              </a:rPr>
-              <a:t>Mettendo tutto in un unico modello, ogni fattore viene “pesato” al netto degli altri. Ecco cosa resiste:</a:t>
-            </a:r>
-          </a:p>
-        </p:txBody>
-      </p:sp>
-      <p:sp>
-        <p:nvSpPr>
-          <p:cNvPr id="7" name="Rectangle 6"/>
-          <p:cNvSpPr/>
-          <p:nvPr/>
-        </p:nvSpPr>
-        <p:spPr>
-          <a:xfrm>
-            <a:off x="548640" y="2743200"/>
-            <a:ext cx="5532120" cy="2743200"/>
-          </a:xfrm>
-          <a:prstGeom prst="rect">
-            <a:avLst/>
-          </a:prstGeom>
-          <a:solidFill>
-            <a:srgbClr val="E8F5EE"/>
-          </a:solidFill>
-          <a:ln>
-            <a:noFill/>
-          </a:ln>
-          <a:effectLst/>
-        </p:spPr>
-        <p:style>
-          <a:lnRef idx="1">
-            <a:schemeClr val="accent1"/>
-          </a:lnRef>
-          <a:fillRef idx="3">
-            <a:schemeClr val="accent1"/>
-          </a:fillRef>
-          <a:effectRef idx="2">
-            <a:schemeClr val="accent1"/>
-          </a:effectRef>
-          <a:fontRef idx="minor">
-            <a:schemeClr val="lt1"/>
-          </a:fontRef>
-        </p:style>
-        <p:txBody>
-          <a:bodyPr rtlCol="0" anchor="ctr"/>
-          <a:lstStyle/>
-          <a:p>
-            <a:pPr algn="ctr"/>
-          </a:p>
-        </p:txBody>
-      </p:sp>
-      <p:sp>
-        <p:nvSpPr>
-          <p:cNvPr id="8" name="Rectangle 7"/>
-          <p:cNvSpPr/>
-          <p:nvPr/>
-        </p:nvSpPr>
-        <p:spPr>
-          <a:xfrm>
-            <a:off x="548640" y="2743200"/>
-            <a:ext cx="5532120" cy="548640"/>
-          </a:xfrm>
-          <a:prstGeom prst="rect">
-            <a:avLst/>
-          </a:prstGeom>
-          <a:solidFill>
-            <a:srgbClr val="1E8B5A"/>
-          </a:solidFill>
-          <a:ln>
-            <a:noFill/>
-          </a:ln>
-          <a:effectLst/>
-        </p:spPr>
-        <p:style>
-          <a:lnRef idx="1">
-            <a:schemeClr val="accent1"/>
-          </a:lnRef>
-          <a:fillRef idx="3">
-            <a:schemeClr val="accent1"/>
-          </a:fillRef>
-          <a:effectRef idx="2">
-            <a:schemeClr val="accent1"/>
-          </a:effectRef>
-          <a:fontRef idx="minor">
-            <a:schemeClr val="lt1"/>
-          </a:fontRef>
-        </p:style>
-        <p:txBody>
-          <a:bodyPr rtlCol="0" anchor="ctr"/>
-          <a:lstStyle/>
-          <a:p>
-            <a:pPr algn="ctr"/>
-          </a:p>
-        </p:txBody>
-      </p:sp>
-      <p:sp>
-        <p:nvSpPr>
-          <p:cNvPr id="9" name="TextBox 8"/>
+              <a:t>Cosa determina il prezzo di uno skipass?</a:t>
+            </a:r>
+          </a:p>
+        </p:txBody>
+      </p:sp>
+      <p:sp>
+        <p:nvSpPr>
+          <p:cNvPr id="18" name="TextBox 17"/>
           <p:cNvSpPr txBox="1"/>
           <p:nvPr/>
         </p:nvSpPr>
         <p:spPr>
           <a:xfrm>
-            <a:off x="731520" y="2743200"/>
-            <a:ext cx="5212080" cy="548640"/>
-          </a:xfrm>
-          <a:prstGeom prst="rect">
-            <a:avLst/>
-          </a:prstGeom>
-          <a:noFill/>
-        </p:spPr>
-        <p:txBody>
-          <a:bodyPr wrap="square" anchor="ctr">
-            <a:spAutoFit/>
-          </a:bodyPr>
-          <a:lstStyle/>
-          <a:p>
-            <a:pPr algn="l">
-              <a:spcBef>
-                <a:spcPts val="0"/>
-              </a:spcBef>
-            </a:pPr>
-            <a:r>
-              <a:rPr sz="1500" b="1">
-                <a:solidFill>
-                  <a:srgbClr val="FFFFFF"/>
-                </a:solidFill>
-                <a:latin typeface="Calibri"/>
-              </a:rPr>
-              <a:t>✓  Restano i veri motori del prezzo</a:t>
-            </a:r>
-          </a:p>
-        </p:txBody>
-      </p:sp>
-      <p:sp>
-        <p:nvSpPr>
-          <p:cNvPr id="10" name="TextBox 9"/>
-          <p:cNvSpPr txBox="1"/>
-          <p:nvPr/>
-        </p:nvSpPr>
-        <p:spPr>
-          <a:xfrm>
-            <a:off x="868680" y="3474720"/>
-            <a:ext cx="5029200" cy="1920240"/>
+            <a:off x="10972800" y="6446520"/>
+            <a:ext cx="822960" cy="274320"/>
           </a:xfrm>
           <a:prstGeom prst="rect">
             <a:avLst/>
@@ -12093,453 +10892,6 @@
           </a:bodyPr>
           <a:lstStyle/>
           <a:p>
-            <a:pPr algn="l" lvl="1">
-              <a:spcBef>
-                <a:spcPts val="0"/>
-              </a:spcBef>
-              <a:spcAft>
-                <a:spcPts val="700"/>
-              </a:spcAft>
-            </a:pPr>
-            <a:r>
-              <a:rPr sz="1400" b="0">
-                <a:solidFill>
-                  <a:srgbClr val="333333"/>
-                </a:solidFill>
-                <a:latin typeface="Calibri"/>
-              </a:rPr>
-              <a:t>• Altitudine — più si sale, più si paga</a:t>
-            </a:r>
-          </a:p>
-          <a:p>
-            <a:pPr algn="l" lvl="1">
-              <a:spcBef>
-                <a:spcPts val="0"/>
-              </a:spcBef>
-              <a:spcAft>
-                <a:spcPts val="700"/>
-              </a:spcAft>
-            </a:pPr>
-            <a:r>
-              <a:rPr sz="1400" b="0">
-                <a:solidFill>
-                  <a:srgbClr val="333333"/>
-                </a:solidFill>
-                <a:latin typeface="Calibri"/>
-              </a:rPr>
-              <a:t>• Geografia — il Nord America resta caro a sé</a:t>
-            </a:r>
-          </a:p>
-          <a:p>
-            <a:pPr algn="l" lvl="1">
-              <a:spcBef>
-                <a:spcPts val="0"/>
-              </a:spcBef>
-              <a:spcAft>
-                <a:spcPts val="700"/>
-              </a:spcAft>
-            </a:pPr>
-            <a:r>
-              <a:rPr sz="1400" b="0">
-                <a:solidFill>
-                  <a:srgbClr val="333333"/>
-                </a:solidFill>
-                <a:latin typeface="Calibri"/>
-              </a:rPr>
-              <a:t>• Ricchezza del Paese (PIL pro capite)</a:t>
-            </a:r>
-          </a:p>
-          <a:p>
-            <a:pPr algn="l" lvl="1">
-              <a:spcBef>
-                <a:spcPts val="0"/>
-              </a:spcBef>
-              <a:spcAft>
-                <a:spcPts val="0"/>
-              </a:spcAft>
-            </a:pPr>
-            <a:r>
-              <a:rPr sz="1400" b="0">
-                <a:solidFill>
-                  <a:srgbClr val="333333"/>
-                </a:solidFill>
-                <a:latin typeface="Calibri"/>
-              </a:rPr>
-              <a:t>• Snowpark — un piccolo premio reale</a:t>
-            </a:r>
-          </a:p>
-        </p:txBody>
-      </p:sp>
-      <p:sp>
-        <p:nvSpPr>
-          <p:cNvPr id="11" name="Rectangle 10"/>
-          <p:cNvSpPr/>
-          <p:nvPr/>
-        </p:nvSpPr>
-        <p:spPr>
-          <a:xfrm>
-            <a:off x="6263640" y="2743200"/>
-            <a:ext cx="5349240" cy="2743200"/>
-          </a:xfrm>
-          <a:prstGeom prst="rect">
-            <a:avLst/>
-          </a:prstGeom>
-          <a:solidFill>
-            <a:srgbClr val="F2F2F2"/>
-          </a:solidFill>
-          <a:ln>
-            <a:noFill/>
-          </a:ln>
-          <a:effectLst/>
-        </p:spPr>
-        <p:style>
-          <a:lnRef idx="1">
-            <a:schemeClr val="accent1"/>
-          </a:lnRef>
-          <a:fillRef idx="3">
-            <a:schemeClr val="accent1"/>
-          </a:fillRef>
-          <a:effectRef idx="2">
-            <a:schemeClr val="accent1"/>
-          </a:effectRef>
-          <a:fontRef idx="minor">
-            <a:schemeClr val="lt1"/>
-          </a:fontRef>
-        </p:style>
-        <p:txBody>
-          <a:bodyPr rtlCol="0" anchor="ctr"/>
-          <a:lstStyle/>
-          <a:p>
-            <a:pPr algn="ctr"/>
-          </a:p>
-        </p:txBody>
-      </p:sp>
-      <p:sp>
-        <p:nvSpPr>
-          <p:cNvPr id="12" name="Rectangle 11"/>
-          <p:cNvSpPr/>
-          <p:nvPr/>
-        </p:nvSpPr>
-        <p:spPr>
-          <a:xfrm>
-            <a:off x="6263640" y="2743200"/>
-            <a:ext cx="5349240" cy="548640"/>
-          </a:xfrm>
-          <a:prstGeom prst="rect">
-            <a:avLst/>
-          </a:prstGeom>
-          <a:solidFill>
-            <a:srgbClr val="555555"/>
-          </a:solidFill>
-          <a:ln>
-            <a:noFill/>
-          </a:ln>
-          <a:effectLst/>
-        </p:spPr>
-        <p:style>
-          <a:lnRef idx="1">
-            <a:schemeClr val="accent1"/>
-          </a:lnRef>
-          <a:fillRef idx="3">
-            <a:schemeClr val="accent1"/>
-          </a:fillRef>
-          <a:effectRef idx="2">
-            <a:schemeClr val="accent1"/>
-          </a:effectRef>
-          <a:fontRef idx="minor">
-            <a:schemeClr val="lt1"/>
-          </a:fontRef>
-        </p:style>
-        <p:txBody>
-          <a:bodyPr rtlCol="0" anchor="ctr"/>
-          <a:lstStyle/>
-          <a:p>
-            <a:pPr algn="ctr"/>
-          </a:p>
-        </p:txBody>
-      </p:sp>
-      <p:sp>
-        <p:nvSpPr>
-          <p:cNvPr id="13" name="TextBox 12"/>
-          <p:cNvSpPr txBox="1"/>
-          <p:nvPr/>
-        </p:nvSpPr>
-        <p:spPr>
-          <a:xfrm>
-            <a:off x="6446520" y="2743200"/>
-            <a:ext cx="5029200" cy="548640"/>
-          </a:xfrm>
-          <a:prstGeom prst="rect">
-            <a:avLst/>
-          </a:prstGeom>
-          <a:noFill/>
-        </p:spPr>
-        <p:txBody>
-          <a:bodyPr wrap="square" anchor="ctr">
-            <a:spAutoFit/>
-          </a:bodyPr>
-          <a:lstStyle/>
-          <a:p>
-            <a:pPr algn="l">
-              <a:spcBef>
-                <a:spcPts val="0"/>
-              </a:spcBef>
-            </a:pPr>
-            <a:r>
-              <a:rPr sz="1500" b="1">
-                <a:solidFill>
-                  <a:srgbClr val="FFFFFF"/>
-                </a:solidFill>
-                <a:latin typeface="Calibri"/>
-              </a:rPr>
-              <a:t>✗  Svaniscono una volta isolati</a:t>
-            </a:r>
-          </a:p>
-        </p:txBody>
-      </p:sp>
-      <p:sp>
-        <p:nvSpPr>
-          <p:cNvPr id="14" name="TextBox 13"/>
-          <p:cNvSpPr txBox="1"/>
-          <p:nvPr/>
-        </p:nvSpPr>
-        <p:spPr>
-          <a:xfrm>
-            <a:off x="6583680" y="3474720"/>
-            <a:ext cx="4937760" cy="1920240"/>
-          </a:xfrm>
-          <a:prstGeom prst="rect">
-            <a:avLst/>
-          </a:prstGeom>
-          <a:noFill/>
-        </p:spPr>
-        <p:txBody>
-          <a:bodyPr wrap="square" anchor="t">
-            <a:spAutoFit/>
-          </a:bodyPr>
-          <a:lstStyle/>
-          <a:p>
-            <a:pPr algn="l" lvl="1">
-              <a:spcBef>
-                <a:spcPts val="0"/>
-              </a:spcBef>
-              <a:spcAft>
-                <a:spcPts val="700"/>
-              </a:spcAft>
-            </a:pPr>
-            <a:r>
-              <a:rPr sz="1400" b="0">
-                <a:solidFill>
-                  <a:srgbClr val="555555"/>
-                </a:solidFill>
-                <a:latin typeface="Calibri"/>
-              </a:rPr>
-              <a:t>• La neve — nessun effetto proprio</a:t>
-            </a:r>
-          </a:p>
-          <a:p>
-            <a:pPr algn="l" lvl="1">
-              <a:spcBef>
-                <a:spcPts val="0"/>
-              </a:spcBef>
-              <a:spcAft>
-                <a:spcPts val="700"/>
-              </a:spcAft>
-            </a:pPr>
-            <a:r>
-              <a:rPr sz="1400" b="0">
-                <a:solidFill>
-                  <a:srgbClr val="555555"/>
-                </a:solidFill>
-                <a:latin typeface="Calibri"/>
-              </a:rPr>
-              <a:t>• Sci estivo — era solo geografia</a:t>
-            </a:r>
-          </a:p>
-          <a:p>
-            <a:pPr algn="l" lvl="1">
-              <a:spcBef>
-                <a:spcPts val="0"/>
-              </a:spcBef>
-              <a:spcAft>
-                <a:spcPts val="700"/>
-              </a:spcAft>
-            </a:pPr>
-            <a:r>
-              <a:rPr sz="1400" b="0">
-                <a:solidFill>
-                  <a:srgbClr val="555555"/>
-                </a:solidFill>
-                <a:latin typeface="Calibri"/>
-              </a:rPr>
-              <a:t>• Costo della vita (PPP), sci notturno</a:t>
-            </a:r>
-          </a:p>
-          <a:p>
-            <a:pPr algn="l" lvl="1">
-              <a:spcBef>
-                <a:spcPts val="0"/>
-              </a:spcBef>
-              <a:spcAft>
-                <a:spcPts val="0"/>
-              </a:spcAft>
-            </a:pPr>
-            <a:r>
-              <a:rPr sz="1400" b="0">
-                <a:solidFill>
-                  <a:srgbClr val="555555"/>
-                </a:solidFill>
-                <a:latin typeface="Calibri"/>
-              </a:rPr>
-              <a:t>• Stagione, numero di impianti</a:t>
-            </a:r>
-          </a:p>
-        </p:txBody>
-      </p:sp>
-      <p:sp>
-        <p:nvSpPr>
-          <p:cNvPr id="15" name="Rectangle 14"/>
-          <p:cNvSpPr/>
-          <p:nvPr/>
-        </p:nvSpPr>
-        <p:spPr>
-          <a:xfrm>
-            <a:off x="548640" y="5715000"/>
-            <a:ext cx="11064240" cy="640080"/>
-          </a:xfrm>
-          <a:prstGeom prst="rect">
-            <a:avLst/>
-          </a:prstGeom>
-          <a:solidFill>
-            <a:srgbClr val="1F3A5F"/>
-          </a:solidFill>
-          <a:ln>
-            <a:noFill/>
-          </a:ln>
-          <a:effectLst/>
-        </p:spPr>
-        <p:style>
-          <a:lnRef idx="1">
-            <a:schemeClr val="accent1"/>
-          </a:lnRef>
-          <a:fillRef idx="3">
-            <a:schemeClr val="accent1"/>
-          </a:fillRef>
-          <a:effectRef idx="2">
-            <a:schemeClr val="accent1"/>
-          </a:effectRef>
-          <a:fontRef idx="minor">
-            <a:schemeClr val="lt1"/>
-          </a:fontRef>
-        </p:style>
-        <p:txBody>
-          <a:bodyPr rtlCol="0" anchor="ctr"/>
-          <a:lstStyle/>
-          <a:p>
-            <a:pPr algn="ctr"/>
-          </a:p>
-        </p:txBody>
-      </p:sp>
-      <p:sp>
-        <p:nvSpPr>
-          <p:cNvPr id="16" name="TextBox 15"/>
-          <p:cNvSpPr txBox="1"/>
-          <p:nvPr/>
-        </p:nvSpPr>
-        <p:spPr>
-          <a:xfrm>
-            <a:off x="822960" y="5715000"/>
-            <a:ext cx="10515600" cy="640080"/>
-          </a:xfrm>
-          <a:prstGeom prst="rect">
-            <a:avLst/>
-          </a:prstGeom>
-          <a:noFill/>
-        </p:spPr>
-        <p:txBody>
-          <a:bodyPr wrap="square" anchor="ctr">
-            <a:spAutoFit/>
-          </a:bodyPr>
-          <a:lstStyle/>
-          <a:p>
-            <a:pPr algn="l">
-              <a:spcBef>
-                <a:spcPts val="0"/>
-              </a:spcBef>
-            </a:pPr>
-            <a:r>
-              <a:rPr sz="1400" b="1">
-                <a:solidFill>
-                  <a:srgbClr val="FFFFFF"/>
-                </a:solidFill>
-                <a:latin typeface="Calibri"/>
-              </a:rPr>
-              <a:t>Questi pochi fattori, insieme, spiegano circa il 70% delle differenze di prezzo tra comprensori.</a:t>
-            </a:r>
-          </a:p>
-        </p:txBody>
-      </p:sp>
-      <p:sp>
-        <p:nvSpPr>
-          <p:cNvPr id="17" name="TextBox 16"/>
-          <p:cNvSpPr txBox="1"/>
-          <p:nvPr/>
-        </p:nvSpPr>
-        <p:spPr>
-          <a:xfrm>
-            <a:off x="548640" y="6446520"/>
-            <a:ext cx="7315200" cy="274320"/>
-          </a:xfrm>
-          <a:prstGeom prst="rect">
-            <a:avLst/>
-          </a:prstGeom>
-          <a:noFill/>
-        </p:spPr>
-        <p:txBody>
-          <a:bodyPr wrap="square" anchor="t">
-            <a:spAutoFit/>
-          </a:bodyPr>
-          <a:lstStyle/>
-          <a:p>
-            <a:pPr algn="l">
-              <a:spcBef>
-                <a:spcPts val="0"/>
-              </a:spcBef>
-            </a:pPr>
-            <a:r>
-              <a:rPr sz="900" b="0">
-                <a:solidFill>
-                  <a:srgbClr val="555555"/>
-                </a:solidFill>
-                <a:latin typeface="Calibri"/>
-              </a:rPr>
-              <a:t>Cosa determina il prezzo di uno skipass?</a:t>
-            </a:r>
-          </a:p>
-        </p:txBody>
-      </p:sp>
-      <p:sp>
-        <p:nvSpPr>
-          <p:cNvPr id="18" name="TextBox 17"/>
-          <p:cNvSpPr txBox="1"/>
-          <p:nvPr/>
-        </p:nvSpPr>
-        <p:spPr>
-          <a:xfrm>
-            <a:off x="10972800" y="6446520"/>
-            <a:ext cx="822960" cy="274320"/>
-          </a:xfrm>
-          <a:prstGeom prst="rect">
-            <a:avLst/>
-          </a:prstGeom>
-          <a:noFill/>
-        </p:spPr>
-        <p:txBody>
-          <a:bodyPr wrap="square" anchor="t">
-            <a:spAutoFit/>
-          </a:bodyPr>
-          <a:lstStyle/>
-          <a:p>
             <a:pPr algn="r">
               <a:spcBef>
                 <a:spcPts val="0"/>
@@ -12553,6 +10905,1102 @@
                 <a:latin typeface="Calibri"/>
               </a:rPr>
               <a:t>8</a:t>
+            </a:r>
+          </a:p>
+        </p:txBody>
+      </p:sp>
+      <p:graphicFrame>
+        <p:nvGraphicFramePr>
+          <p:cNvPr id="19" name="Table 18"/>
+          <p:cNvGraphicFramePr>
+            <a:graphicFrameLocks noGrp="1"/>
+          </p:cNvGraphicFramePr>
+          <p:nvPr/>
+        </p:nvGraphicFramePr>
+        <p:xfrm>
+          <a:off x="548640" y="1371600"/>
+          <a:ext cx="11064240" cy="4517136"/>
+        </p:xfrm>
+        <a:graphic>
+          <a:graphicData uri="http://schemas.openxmlformats.org/drawingml/2006/table">
+            <a:tbl>
+              <a:tblPr>
+                <a:tableStyleId>{5C22544A-7EE6-4342-B048-85BDC9FD1C3A}</a:tableStyleId>
+              </a:tblPr>
+              <a:tblGrid>
+                <a:gridCol w="2971800"/>
+                <a:gridCol w="1417320"/>
+                <a:gridCol w="5029200"/>
+                <a:gridCol w="1645920"/>
+              </a:tblGrid>
+              <a:tr h="310896">
+                <a:tc>
+                  <a:txBody>
+                    <a:bodyPr/>
+                    <a:lstStyle/>
+                    <a:p>
+                      <a:pPr algn="l"/>
+                      <a:r>
+                        <a:rPr sz="1100" b="1">
+                          <a:solidFill>
+                            <a:srgbClr val="FFFFFF"/>
+                          </a:solidFill>
+                          <a:latin typeface="Calibri"/>
+                        </a:rPr>
+                        <a:t>Fattore</a:t>
+                      </a:r>
+                    </a:p>
+                  </a:txBody>
+                  <a:tcPr anchor="ctr" marL="64008" marR="64008" marT="9144" marB="9144">
+                    <a:solidFill>
+                      <a:srgbClr val="1F3A5F"/>
+                    </a:solidFill>
+                  </a:tcPr>
+                </a:tc>
+                <a:tc>
+                  <a:txBody>
+                    <a:bodyPr/>
+                    <a:lstStyle/>
+                    <a:p>
+                      <a:pPr algn="l"/>
+                      <a:r>
+                        <a:rPr sz="1100" b="1">
+                          <a:solidFill>
+                            <a:srgbClr val="FFFFFF"/>
+                          </a:solidFill>
+                          <a:latin typeface="Calibri"/>
+                        </a:rPr>
+                        <a:t>Test</a:t>
+                      </a:r>
+                    </a:p>
+                  </a:txBody>
+                  <a:tcPr anchor="ctr" marL="64008" marR="64008" marT="9144" marB="9144">
+                    <a:solidFill>
+                      <a:srgbClr val="1F3A5F"/>
+                    </a:solidFill>
+                  </a:tcPr>
+                </a:tc>
+                <a:tc>
+                  <a:txBody>
+                    <a:bodyPr/>
+                    <a:lstStyle/>
+                    <a:p>
+                      <a:pPr algn="l"/>
+                      <a:r>
+                        <a:rPr sz="1100" b="1">
+                          <a:solidFill>
+                            <a:srgbClr val="FFFFFF"/>
+                          </a:solidFill>
+                          <a:latin typeface="Calibri"/>
+                        </a:rPr>
+                        <a:t>Risultato</a:t>
+                      </a:r>
+                    </a:p>
+                  </a:txBody>
+                  <a:tcPr anchor="ctr" marL="64008" marR="64008" marT="9144" marB="9144">
+                    <a:solidFill>
+                      <a:srgbClr val="1F3A5F"/>
+                    </a:solidFill>
+                  </a:tcPr>
+                </a:tc>
+                <a:tc>
+                  <a:txBody>
+                    <a:bodyPr/>
+                    <a:lstStyle/>
+                    <a:p>
+                      <a:pPr algn="ctr"/>
+                      <a:r>
+                        <a:rPr sz="1100" b="1">
+                          <a:solidFill>
+                            <a:srgbClr val="FFFFFF"/>
+                          </a:solidFill>
+                          <a:latin typeface="Calibri"/>
+                        </a:rPr>
+                        <a:t>Effetto</a:t>
+                      </a:r>
+                    </a:p>
+                  </a:txBody>
+                  <a:tcPr anchor="ctr" marL="64008" marR="64008" marT="9144" marB="9144">
+                    <a:solidFill>
+                      <a:srgbClr val="1F3A5F"/>
+                    </a:solidFill>
+                  </a:tcPr>
+                </a:tc>
+              </a:tr>
+              <a:tr h="420624">
+                <a:tc>
+                  <a:txBody>
+                    <a:bodyPr/>
+                    <a:lstStyle/>
+                    <a:p>
+                      <a:pPr algn="l"/>
+                      <a:r>
+                        <a:rPr sz="950" b="1">
+                          <a:solidFill>
+                            <a:srgbClr val="222A35"/>
+                          </a:solidFill>
+                          <a:latin typeface="Calibri"/>
+                        </a:rPr>
+                        <a:t>Continente — geografia</a:t>
+                      </a:r>
+                    </a:p>
+                  </a:txBody>
+                  <a:tcPr anchor="ctr" marL="64008" marR="64008" marT="9144" marB="9144">
+                    <a:solidFill>
+                      <a:srgbClr val="FFFFFF"/>
+                    </a:solidFill>
+                  </a:tcPr>
+                </a:tc>
+                <a:tc>
+                  <a:txBody>
+                    <a:bodyPr/>
+                    <a:lstStyle/>
+                    <a:p>
+                      <a:pPr algn="l"/>
+                      <a:r>
+                        <a:rPr sz="950" b="0">
+                          <a:solidFill>
+                            <a:srgbClr val="222A35"/>
+                          </a:solidFill>
+                          <a:latin typeface="Calibri"/>
+                        </a:rPr>
+                        <a:t>ANOVA</a:t>
+                      </a:r>
+                    </a:p>
+                  </a:txBody>
+                  <a:tcPr anchor="ctr" marL="64008" marR="64008" marT="9144" marB="9144">
+                    <a:solidFill>
+                      <a:srgbClr val="FFFFFF"/>
+                    </a:solidFill>
+                  </a:tcPr>
+                </a:tc>
+                <a:tc>
+                  <a:txBody>
+                    <a:bodyPr/>
+                    <a:lstStyle/>
+                    <a:p>
+                      <a:pPr algn="l"/>
+                      <a:r>
+                        <a:rPr sz="950" b="0">
+                          <a:solidFill>
+                            <a:srgbClr val="222A35"/>
+                          </a:solidFill>
+                          <a:latin typeface="Calibri"/>
+                        </a:rPr>
+                        <a:t>Nord America ~+38 $ sull’Europa (F≈117, p&lt;0,001)</a:t>
+                      </a:r>
+                    </a:p>
+                  </a:txBody>
+                  <a:tcPr anchor="ctr" marL="64008" marR="64008" marT="9144" marB="9144">
+                    <a:solidFill>
+                      <a:srgbClr val="FFFFFF"/>
+                    </a:solidFill>
+                  </a:tcPr>
+                </a:tc>
+                <a:tc>
+                  <a:txBody>
+                    <a:bodyPr/>
+                    <a:lstStyle/>
+                    <a:p>
+                      <a:pPr algn="ctr"/>
+                      <a:r>
+                        <a:rPr sz="950" b="1">
+                          <a:solidFill>
+                            <a:srgbClr val="1F3A5F"/>
+                          </a:solidFill>
+                          <a:latin typeface="Calibri"/>
+                        </a:rPr>
+                        <a:t>Forte</a:t>
+                      </a:r>
+                    </a:p>
+                  </a:txBody>
+                  <a:tcPr anchor="ctr" marL="64008" marR="64008" marT="9144" marB="9144">
+                    <a:solidFill>
+                      <a:srgbClr val="FFFFFF"/>
+                    </a:solidFill>
+                  </a:tcPr>
+                </a:tc>
+              </a:tr>
+              <a:tr h="420624">
+                <a:tc>
+                  <a:txBody>
+                    <a:bodyPr/>
+                    <a:lstStyle/>
+                    <a:p>
+                      <a:pPr algn="l"/>
+                      <a:r>
+                        <a:rPr sz="950" b="1">
+                          <a:solidFill>
+                            <a:srgbClr val="222A35"/>
+                          </a:solidFill>
+                          <a:latin typeface="Calibri"/>
+                        </a:rPr>
+                        <a:t>Ricchezza naz. (PIL pro capite)</a:t>
+                      </a:r>
+                    </a:p>
+                  </a:txBody>
+                  <a:tcPr anchor="ctr" marL="64008" marR="64008" marT="9144" marB="9144">
+                    <a:solidFill>
+                      <a:srgbClr val="EEF1F5"/>
+                    </a:solidFill>
+                  </a:tcPr>
+                </a:tc>
+                <a:tc>
+                  <a:txBody>
+                    <a:bodyPr/>
+                    <a:lstStyle/>
+                    <a:p>
+                      <a:pPr algn="l"/>
+                      <a:r>
+                        <a:rPr sz="950" b="0">
+                          <a:solidFill>
+                            <a:srgbClr val="222A35"/>
+                          </a:solidFill>
+                          <a:latin typeface="Calibri"/>
+                        </a:rPr>
+                        <a:t>Correlazione</a:t>
+                      </a:r>
+                    </a:p>
+                  </a:txBody>
+                  <a:tcPr anchor="ctr" marL="64008" marR="64008" marT="9144" marB="9144">
+                    <a:solidFill>
+                      <a:srgbClr val="EEF1F5"/>
+                    </a:solidFill>
+                  </a:tcPr>
+                </a:tc>
+                <a:tc>
+                  <a:txBody>
+                    <a:bodyPr/>
+                    <a:lstStyle/>
+                    <a:p>
+                      <a:pPr algn="l"/>
+                      <a:r>
+                        <a:rPr sz="950" b="0">
+                          <a:solidFill>
+                            <a:srgbClr val="222A35"/>
+                          </a:solidFill>
+                          <a:latin typeface="Calibri"/>
+                        </a:rPr>
+                        <a:t>r≈0,46 — i Paesi più ricchi pagano di più</a:t>
+                      </a:r>
+                    </a:p>
+                  </a:txBody>
+                  <a:tcPr anchor="ctr" marL="64008" marR="64008" marT="9144" marB="9144">
+                    <a:solidFill>
+                      <a:srgbClr val="EEF1F5"/>
+                    </a:solidFill>
+                  </a:tcPr>
+                </a:tc>
+                <a:tc>
+                  <a:txBody>
+                    <a:bodyPr/>
+                    <a:lstStyle/>
+                    <a:p>
+                      <a:pPr algn="ctr"/>
+                      <a:r>
+                        <a:rPr sz="950" b="1">
+                          <a:solidFill>
+                            <a:srgbClr val="1F3A5F"/>
+                          </a:solidFill>
+                          <a:latin typeface="Calibri"/>
+                        </a:rPr>
+                        <a:t>Moderato</a:t>
+                      </a:r>
+                    </a:p>
+                  </a:txBody>
+                  <a:tcPr anchor="ctr" marL="64008" marR="64008" marT="9144" marB="9144">
+                    <a:solidFill>
+                      <a:srgbClr val="EEF1F5"/>
+                    </a:solidFill>
+                  </a:tcPr>
+                </a:tc>
+              </a:tr>
+              <a:tr h="420624">
+                <a:tc>
+                  <a:txBody>
+                    <a:bodyPr/>
+                    <a:lstStyle/>
+                    <a:p>
+                      <a:pPr algn="l"/>
+                      <a:r>
+                        <a:rPr sz="950" b="1">
+                          <a:solidFill>
+                            <a:srgbClr val="222A35"/>
+                          </a:solidFill>
+                          <a:latin typeface="Calibri"/>
+                        </a:rPr>
+                        <a:t>Altitudine massima</a:t>
+                      </a:r>
+                    </a:p>
+                  </a:txBody>
+                  <a:tcPr anchor="ctr" marL="64008" marR="64008" marT="9144" marB="9144">
+                    <a:solidFill>
+                      <a:srgbClr val="FFFFFF"/>
+                    </a:solidFill>
+                  </a:tcPr>
+                </a:tc>
+                <a:tc>
+                  <a:txBody>
+                    <a:bodyPr/>
+                    <a:lstStyle/>
+                    <a:p>
+                      <a:pPr algn="l"/>
+                      <a:r>
+                        <a:rPr sz="950" b="0">
+                          <a:solidFill>
+                            <a:srgbClr val="222A35"/>
+                          </a:solidFill>
+                          <a:latin typeface="Calibri"/>
+                        </a:rPr>
+                        <a:t>Correlazione</a:t>
+                      </a:r>
+                    </a:p>
+                  </a:txBody>
+                  <a:tcPr anchor="ctr" marL="64008" marR="64008" marT="9144" marB="9144">
+                    <a:solidFill>
+                      <a:srgbClr val="FFFFFF"/>
+                    </a:solidFill>
+                  </a:tcPr>
+                </a:tc>
+                <a:tc>
+                  <a:txBody>
+                    <a:bodyPr/>
+                    <a:lstStyle/>
+                    <a:p>
+                      <a:pPr algn="l"/>
+                      <a:r>
+                        <a:rPr sz="950" b="0">
+                          <a:solidFill>
+                            <a:srgbClr val="222A35"/>
+                          </a:solidFill>
+                          <a:latin typeface="Calibri"/>
+                        </a:rPr>
+                        <a:t>r≈0,41 — più in alto, più caro</a:t>
+                      </a:r>
+                    </a:p>
+                  </a:txBody>
+                  <a:tcPr anchor="ctr" marL="64008" marR="64008" marT="9144" marB="9144">
+                    <a:solidFill>
+                      <a:srgbClr val="FFFFFF"/>
+                    </a:solidFill>
+                  </a:tcPr>
+                </a:tc>
+                <a:tc>
+                  <a:txBody>
+                    <a:bodyPr/>
+                    <a:lstStyle/>
+                    <a:p>
+                      <a:pPr algn="ctr"/>
+                      <a:r>
+                        <a:rPr sz="950" b="1">
+                          <a:solidFill>
+                            <a:srgbClr val="1F3A5F"/>
+                          </a:solidFill>
+                          <a:latin typeface="Calibri"/>
+                        </a:rPr>
+                        <a:t>Moderato</a:t>
+                      </a:r>
+                    </a:p>
+                  </a:txBody>
+                  <a:tcPr anchor="ctr" marL="64008" marR="64008" marT="9144" marB="9144">
+                    <a:solidFill>
+                      <a:srgbClr val="FFFFFF"/>
+                    </a:solidFill>
+                  </a:tcPr>
+                </a:tc>
+              </a:tr>
+              <a:tr h="420624">
+                <a:tc>
+                  <a:txBody>
+                    <a:bodyPr/>
+                    <a:lstStyle/>
+                    <a:p>
+                      <a:pPr algn="l"/>
+                      <a:r>
+                        <a:rPr sz="950" b="1">
+                          <a:solidFill>
+                            <a:srgbClr val="222A35"/>
+                          </a:solidFill>
+                          <a:latin typeface="Calibri"/>
+                        </a:rPr>
+                        <a:t>Dimensione (totale piste)</a:t>
+                      </a:r>
+                    </a:p>
+                  </a:txBody>
+                  <a:tcPr anchor="ctr" marL="64008" marR="64008" marT="9144" marB="9144">
+                    <a:solidFill>
+                      <a:srgbClr val="EEF1F5"/>
+                    </a:solidFill>
+                  </a:tcPr>
+                </a:tc>
+                <a:tc>
+                  <a:txBody>
+                    <a:bodyPr/>
+                    <a:lstStyle/>
+                    <a:p>
+                      <a:pPr algn="l"/>
+                      <a:r>
+                        <a:rPr sz="950" b="0">
+                          <a:solidFill>
+                            <a:srgbClr val="222A35"/>
+                          </a:solidFill>
+                          <a:latin typeface="Calibri"/>
+                        </a:rPr>
+                        <a:t>Correlazione</a:t>
+                      </a:r>
+                    </a:p>
+                  </a:txBody>
+                  <a:tcPr anchor="ctr" marL="64008" marR="64008" marT="9144" marB="9144">
+                    <a:solidFill>
+                      <a:srgbClr val="EEF1F5"/>
+                    </a:solidFill>
+                  </a:tcPr>
+                </a:tc>
+                <a:tc>
+                  <a:txBody>
+                    <a:bodyPr/>
+                    <a:lstStyle/>
+                    <a:p>
+                      <a:pPr algn="l"/>
+                      <a:r>
+                        <a:rPr sz="950" b="0">
+                          <a:solidFill>
+                            <a:srgbClr val="222A35"/>
+                          </a:solidFill>
+                          <a:latin typeface="Calibri"/>
+                        </a:rPr>
+                        <a:t>r≈0,31</a:t>
+                      </a:r>
+                    </a:p>
+                  </a:txBody>
+                  <a:tcPr anchor="ctr" marL="64008" marR="64008" marT="9144" marB="9144">
+                    <a:solidFill>
+                      <a:srgbClr val="EEF1F5"/>
+                    </a:solidFill>
+                  </a:tcPr>
+                </a:tc>
+                <a:tc>
+                  <a:txBody>
+                    <a:bodyPr/>
+                    <a:lstStyle/>
+                    <a:p>
+                      <a:pPr algn="ctr"/>
+                      <a:r>
+                        <a:rPr sz="950" b="1">
+                          <a:solidFill>
+                            <a:srgbClr val="1F3A5F"/>
+                          </a:solidFill>
+                          <a:latin typeface="Calibri"/>
+                        </a:rPr>
+                        <a:t>Moderato</a:t>
+                      </a:r>
+                    </a:p>
+                  </a:txBody>
+                  <a:tcPr anchor="ctr" marL="64008" marR="64008" marT="9144" marB="9144">
+                    <a:solidFill>
+                      <a:srgbClr val="EEF1F5"/>
+                    </a:solidFill>
+                  </a:tcPr>
+                </a:tc>
+              </a:tr>
+              <a:tr h="420624">
+                <a:tc>
+                  <a:txBody>
+                    <a:bodyPr/>
+                    <a:lstStyle/>
+                    <a:p>
+                      <a:pPr algn="l"/>
+                      <a:r>
+                        <a:rPr sz="950" b="1">
+                          <a:solidFill>
+                            <a:srgbClr val="222A35"/>
+                          </a:solidFill>
+                          <a:latin typeface="Calibri"/>
+                        </a:rPr>
+                        <a:t>Snowpark</a:t>
+                      </a:r>
+                    </a:p>
+                  </a:txBody>
+                  <a:tcPr anchor="ctr" marL="64008" marR="64008" marT="9144" marB="9144">
+                    <a:solidFill>
+                      <a:srgbClr val="FFFFFF"/>
+                    </a:solidFill>
+                  </a:tcPr>
+                </a:tc>
+                <a:tc>
+                  <a:txBody>
+                    <a:bodyPr/>
+                    <a:lstStyle/>
+                    <a:p>
+                      <a:pPr algn="l"/>
+                      <a:r>
+                        <a:rPr sz="950" b="0">
+                          <a:solidFill>
+                            <a:srgbClr val="222A35"/>
+                          </a:solidFill>
+                          <a:latin typeface="Calibri"/>
+                        </a:rPr>
+                        <a:t>t-test</a:t>
+                      </a:r>
+                    </a:p>
+                  </a:txBody>
+                  <a:tcPr anchor="ctr" marL="64008" marR="64008" marT="9144" marB="9144">
+                    <a:solidFill>
+                      <a:srgbClr val="FFFFFF"/>
+                    </a:solidFill>
+                  </a:tcPr>
+                </a:tc>
+                <a:tc>
+                  <a:txBody>
+                    <a:bodyPr/>
+                    <a:lstStyle/>
+                    <a:p>
+                      <a:pPr algn="l"/>
+                      <a:r>
+                        <a:rPr sz="950" b="0">
+                          <a:solidFill>
+                            <a:srgbClr val="222A35"/>
+                          </a:solidFill>
+                          <a:latin typeface="Calibri"/>
+                        </a:rPr>
+                        <a:t>premio reale ~+10 $ (p&lt;0,001)</a:t>
+                      </a:r>
+                    </a:p>
+                  </a:txBody>
+                  <a:tcPr anchor="ctr" marL="64008" marR="64008" marT="9144" marB="9144">
+                    <a:solidFill>
+                      <a:srgbClr val="FFFFFF"/>
+                    </a:solidFill>
+                  </a:tcPr>
+                </a:tc>
+                <a:tc>
+                  <a:txBody>
+                    <a:bodyPr/>
+                    <a:lstStyle/>
+                    <a:p>
+                      <a:pPr algn="ctr"/>
+                      <a:r>
+                        <a:rPr sz="950" b="1">
+                          <a:solidFill>
+                            <a:srgbClr val="1F3A5F"/>
+                          </a:solidFill>
+                          <a:latin typeface="Calibri"/>
+                        </a:rPr>
+                        <a:t>Moderato</a:t>
+                      </a:r>
+                    </a:p>
+                  </a:txBody>
+                  <a:tcPr anchor="ctr" marL="64008" marR="64008" marT="9144" marB="9144">
+                    <a:solidFill>
+                      <a:srgbClr val="FFFFFF"/>
+                    </a:solidFill>
+                  </a:tcPr>
+                </a:tc>
+              </a:tr>
+              <a:tr h="420624">
+                <a:tc>
+                  <a:txBody>
+                    <a:bodyPr/>
+                    <a:lstStyle/>
+                    <a:p>
+                      <a:pPr algn="l"/>
+                      <a:r>
+                        <a:rPr sz="950" b="1">
+                          <a:solidFill>
+                            <a:srgbClr val="222A35"/>
+                          </a:solidFill>
+                          <a:latin typeface="Calibri"/>
+                        </a:rPr>
+                        <a:t>Sci estivo</a:t>
+                      </a:r>
+                    </a:p>
+                  </a:txBody>
+                  <a:tcPr anchor="ctr" marL="64008" marR="64008" marT="9144" marB="9144">
+                    <a:solidFill>
+                      <a:srgbClr val="EEF1F5"/>
+                    </a:solidFill>
+                  </a:tcPr>
+                </a:tc>
+                <a:tc>
+                  <a:txBody>
+                    <a:bodyPr/>
+                    <a:lstStyle/>
+                    <a:p>
+                      <a:pPr algn="l"/>
+                      <a:r>
+                        <a:rPr sz="950" b="0">
+                          <a:solidFill>
+                            <a:srgbClr val="222A35"/>
+                          </a:solidFill>
+                          <a:latin typeface="Calibri"/>
+                        </a:rPr>
+                        <a:t>t-test / Chi²</a:t>
+                      </a:r>
+                    </a:p>
+                  </a:txBody>
+                  <a:tcPr anchor="ctr" marL="64008" marR="64008" marT="9144" marB="9144">
+                    <a:solidFill>
+                      <a:srgbClr val="EEF1F5"/>
+                    </a:solidFill>
+                  </a:tcPr>
+                </a:tc>
+                <a:tc>
+                  <a:txBody>
+                    <a:bodyPr/>
+                    <a:lstStyle/>
+                    <a:p>
+                      <a:pPr algn="l"/>
+                      <a:r>
+                        <a:rPr sz="950" b="0">
+                          <a:solidFill>
+                            <a:srgbClr val="222A35"/>
+                          </a:solidFill>
+                          <a:latin typeface="Calibri"/>
+                        </a:rPr>
+                        <a:t>apparente +14 $, ma è geografia (V≈0,76)</a:t>
+                      </a:r>
+                    </a:p>
+                  </a:txBody>
+                  <a:tcPr anchor="ctr" marL="64008" marR="64008" marT="9144" marB="9144">
+                    <a:solidFill>
+                      <a:srgbClr val="EEF1F5"/>
+                    </a:solidFill>
+                  </a:tcPr>
+                </a:tc>
+                <a:tc>
+                  <a:txBody>
+                    <a:bodyPr/>
+                    <a:lstStyle/>
+                    <a:p>
+                      <a:pPr algn="ctr"/>
+                      <a:r>
+                        <a:rPr sz="950" b="1">
+                          <a:solidFill>
+                            <a:srgbClr val="1F3A5F"/>
+                          </a:solidFill>
+                          <a:latin typeface="Calibri"/>
+                        </a:rPr>
+                        <a:t>Debole</a:t>
+                      </a:r>
+                    </a:p>
+                  </a:txBody>
+                  <a:tcPr anchor="ctr" marL="64008" marR="64008" marT="9144" marB="9144">
+                    <a:solidFill>
+                      <a:srgbClr val="EEF1F5"/>
+                    </a:solidFill>
+                  </a:tcPr>
+                </a:tc>
+              </a:tr>
+              <a:tr h="420624">
+                <a:tc>
+                  <a:txBody>
+                    <a:bodyPr/>
+                    <a:lstStyle/>
+                    <a:p>
+                      <a:pPr algn="l"/>
+                      <a:r>
+                        <a:rPr sz="950" b="1">
+                          <a:solidFill>
+                            <a:srgbClr val="222A35"/>
+                          </a:solidFill>
+                          <a:latin typeface="Calibri"/>
+                        </a:rPr>
+                        <a:t>Dislivello / impianti</a:t>
+                      </a:r>
+                    </a:p>
+                  </a:txBody>
+                  <a:tcPr anchor="ctr" marL="64008" marR="64008" marT="9144" marB="9144">
+                    <a:solidFill>
+                      <a:srgbClr val="FFFFFF"/>
+                    </a:solidFill>
+                  </a:tcPr>
+                </a:tc>
+                <a:tc>
+                  <a:txBody>
+                    <a:bodyPr/>
+                    <a:lstStyle/>
+                    <a:p>
+                      <a:pPr algn="l"/>
+                      <a:r>
+                        <a:rPr sz="950" b="0">
+                          <a:solidFill>
+                            <a:srgbClr val="222A35"/>
+                          </a:solidFill>
+                          <a:latin typeface="Calibri"/>
+                        </a:rPr>
+                        <a:t>Correlazione</a:t>
+                      </a:r>
+                    </a:p>
+                  </a:txBody>
+                  <a:tcPr anchor="ctr" marL="64008" marR="64008" marT="9144" marB="9144">
+                    <a:solidFill>
+                      <a:srgbClr val="FFFFFF"/>
+                    </a:solidFill>
+                  </a:tcPr>
+                </a:tc>
+                <a:tc>
+                  <a:txBody>
+                    <a:bodyPr/>
+                    <a:lstStyle/>
+                    <a:p>
+                      <a:pPr algn="l"/>
+                      <a:r>
+                        <a:rPr sz="950" b="0">
+                          <a:solidFill>
+                            <a:srgbClr val="222A35"/>
+                          </a:solidFill>
+                          <a:latin typeface="Calibri"/>
+                        </a:rPr>
+                        <a:t>r≈0,17 / 0,10</a:t>
+                      </a:r>
+                    </a:p>
+                  </a:txBody>
+                  <a:tcPr anchor="ctr" marL="64008" marR="64008" marT="9144" marB="9144">
+                    <a:solidFill>
+                      <a:srgbClr val="FFFFFF"/>
+                    </a:solidFill>
+                  </a:tcPr>
+                </a:tc>
+                <a:tc>
+                  <a:txBody>
+                    <a:bodyPr/>
+                    <a:lstStyle/>
+                    <a:p>
+                      <a:pPr algn="ctr"/>
+                      <a:r>
+                        <a:rPr sz="950" b="1">
+                          <a:solidFill>
+                            <a:srgbClr val="1F3A5F"/>
+                          </a:solidFill>
+                          <a:latin typeface="Calibri"/>
+                        </a:rPr>
+                        <a:t>Debole</a:t>
+                      </a:r>
+                    </a:p>
+                  </a:txBody>
+                  <a:tcPr anchor="ctr" marL="64008" marR="64008" marT="9144" marB="9144">
+                    <a:solidFill>
+                      <a:srgbClr val="FFFFFF"/>
+                    </a:solidFill>
+                  </a:tcPr>
+                </a:tc>
+              </a:tr>
+              <a:tr h="420624">
+                <a:tc>
+                  <a:txBody>
+                    <a:bodyPr/>
+                    <a:lstStyle/>
+                    <a:p>
+                      <a:pPr algn="l"/>
+                      <a:r>
+                        <a:rPr sz="950" b="1">
+                          <a:solidFill>
+                            <a:srgbClr val="222A35"/>
+                          </a:solidFill>
+                          <a:latin typeface="Calibri"/>
+                        </a:rPr>
+                        <a:t>Stagionalità</a:t>
+                      </a:r>
+                    </a:p>
+                  </a:txBody>
+                  <a:tcPr anchor="ctr" marL="64008" marR="64008" marT="9144" marB="9144">
+                    <a:solidFill>
+                      <a:srgbClr val="EEF1F5"/>
+                    </a:solidFill>
+                  </a:tcPr>
+                </a:tc>
+                <a:tc>
+                  <a:txBody>
+                    <a:bodyPr/>
+                    <a:lstStyle/>
+                    <a:p>
+                      <a:pPr algn="l"/>
+                      <a:r>
+                        <a:rPr sz="950" b="0">
+                          <a:solidFill>
+                            <a:srgbClr val="222A35"/>
+                          </a:solidFill>
+                          <a:latin typeface="Calibri"/>
+                        </a:rPr>
+                        <a:t>ANOVA</a:t>
+                      </a:r>
+                    </a:p>
+                  </a:txBody>
+                  <a:tcPr anchor="ctr" marL="64008" marR="64008" marT="9144" marB="9144">
+                    <a:solidFill>
+                      <a:srgbClr val="EEF1F5"/>
+                    </a:solidFill>
+                  </a:tcPr>
+                </a:tc>
+                <a:tc>
+                  <a:txBody>
+                    <a:bodyPr/>
+                    <a:lstStyle/>
+                    <a:p>
+                      <a:pPr algn="l"/>
+                      <a:r>
+                        <a:rPr sz="950" b="0">
+                          <a:solidFill>
+                            <a:srgbClr val="222A35"/>
+                          </a:solidFill>
+                          <a:latin typeface="Calibri"/>
+                        </a:rPr>
+                        <a:t>F≈2,9 (p≈0,034)</a:t>
+                      </a:r>
+                    </a:p>
+                  </a:txBody>
+                  <a:tcPr anchor="ctr" marL="64008" marR="64008" marT="9144" marB="9144">
+                    <a:solidFill>
+                      <a:srgbClr val="EEF1F5"/>
+                    </a:solidFill>
+                  </a:tcPr>
+                </a:tc>
+                <a:tc>
+                  <a:txBody>
+                    <a:bodyPr/>
+                    <a:lstStyle/>
+                    <a:p>
+                      <a:pPr algn="ctr"/>
+                      <a:r>
+                        <a:rPr sz="950" b="1">
+                          <a:solidFill>
+                            <a:srgbClr val="1F3A5F"/>
+                          </a:solidFill>
+                          <a:latin typeface="Calibri"/>
+                        </a:rPr>
+                        <a:t>Debole</a:t>
+                      </a:r>
+                    </a:p>
+                  </a:txBody>
+                  <a:tcPr anchor="ctr" marL="64008" marR="64008" marT="9144" marB="9144">
+                    <a:solidFill>
+                      <a:srgbClr val="EEF1F5"/>
+                    </a:solidFill>
+                  </a:tcPr>
+                </a:tc>
+              </a:tr>
+              <a:tr h="420624">
+                <a:tc>
+                  <a:txBody>
+                    <a:bodyPr/>
+                    <a:lstStyle/>
+                    <a:p>
+                      <a:pPr algn="l"/>
+                      <a:r>
+                        <a:rPr sz="950" b="1">
+                          <a:solidFill>
+                            <a:srgbClr val="222A35"/>
+                          </a:solidFill>
+                          <a:latin typeface="Calibri"/>
+                        </a:rPr>
+                        <a:t>Sci notturno / bambini</a:t>
+                      </a:r>
+                    </a:p>
+                  </a:txBody>
+                  <a:tcPr anchor="ctr" marL="64008" marR="64008" marT="9144" marB="9144">
+                    <a:solidFill>
+                      <a:srgbClr val="FFFFFF"/>
+                    </a:solidFill>
+                  </a:tcPr>
+                </a:tc>
+                <a:tc>
+                  <a:txBody>
+                    <a:bodyPr/>
+                    <a:lstStyle/>
+                    <a:p>
+                      <a:pPr algn="l"/>
+                      <a:r>
+                        <a:rPr sz="950" b="0">
+                          <a:solidFill>
+                            <a:srgbClr val="222A35"/>
+                          </a:solidFill>
+                          <a:latin typeface="Calibri"/>
+                        </a:rPr>
+                        <a:t>t-test</a:t>
+                      </a:r>
+                    </a:p>
+                  </a:txBody>
+                  <a:tcPr anchor="ctr" marL="64008" marR="64008" marT="9144" marB="9144">
+                    <a:solidFill>
+                      <a:srgbClr val="FFFFFF"/>
+                    </a:solidFill>
+                  </a:tcPr>
+                </a:tc>
+                <a:tc>
+                  <a:txBody>
+                    <a:bodyPr/>
+                    <a:lstStyle/>
+                    <a:p>
+                      <a:pPr algn="l"/>
+                      <a:r>
+                        <a:rPr sz="950" b="0">
+                          <a:solidFill>
+                            <a:srgbClr val="222A35"/>
+                          </a:solidFill>
+                          <a:latin typeface="Calibri"/>
+                        </a:rPr>
+                        <a:t>nessuna differenza significativa</a:t>
+                      </a:r>
+                    </a:p>
+                  </a:txBody>
+                  <a:tcPr anchor="ctr" marL="64008" marR="64008" marT="9144" marB="9144">
+                    <a:solidFill>
+                      <a:srgbClr val="FFFFFF"/>
+                    </a:solidFill>
+                  </a:tcPr>
+                </a:tc>
+                <a:tc>
+                  <a:txBody>
+                    <a:bodyPr/>
+                    <a:lstStyle/>
+                    <a:p>
+                      <a:pPr algn="ctr"/>
+                      <a:r>
+                        <a:rPr sz="950" b="1">
+                          <a:solidFill>
+                            <a:srgbClr val="1F3A5F"/>
+                          </a:solidFill>
+                          <a:latin typeface="Calibri"/>
+                        </a:rPr>
+                        <a:t>Trascurabile</a:t>
+                      </a:r>
+                    </a:p>
+                  </a:txBody>
+                  <a:tcPr anchor="ctr" marL="64008" marR="64008" marT="9144" marB="9144">
+                    <a:solidFill>
+                      <a:srgbClr val="FFFFFF"/>
+                    </a:solidFill>
+                  </a:tcPr>
+                </a:tc>
+              </a:tr>
+              <a:tr h="420624">
+                <a:tc>
+                  <a:txBody>
+                    <a:bodyPr/>
+                    <a:lstStyle/>
+                    <a:p>
+                      <a:pPr algn="l"/>
+                      <a:r>
+                        <a:rPr sz="950" b="1">
+                          <a:solidFill>
+                            <a:srgbClr val="222A35"/>
+                          </a:solidFill>
+                          <a:latin typeface="Calibri"/>
+                        </a:rPr>
+                        <a:t>Copertura nevosa</a:t>
+                      </a:r>
+                    </a:p>
+                  </a:txBody>
+                  <a:tcPr anchor="ctr" marL="64008" marR="64008" marT="9144" marB="9144">
+                    <a:solidFill>
+                      <a:srgbClr val="EEF1F5"/>
+                    </a:solidFill>
+                  </a:tcPr>
+                </a:tc>
+                <a:tc>
+                  <a:txBody>
+                    <a:bodyPr/>
+                    <a:lstStyle/>
+                    <a:p>
+                      <a:pPr algn="l"/>
+                      <a:r>
+                        <a:rPr sz="950" b="0">
+                          <a:solidFill>
+                            <a:srgbClr val="222A35"/>
+                          </a:solidFill>
+                          <a:latin typeface="Calibri"/>
+                        </a:rPr>
+                        <a:t>Correlazione</a:t>
+                      </a:r>
+                    </a:p>
+                  </a:txBody>
+                  <a:tcPr anchor="ctr" marL="64008" marR="64008" marT="9144" marB="9144">
+                    <a:solidFill>
+                      <a:srgbClr val="EEF1F5"/>
+                    </a:solidFill>
+                  </a:tcPr>
+                </a:tc>
+                <a:tc>
+                  <a:txBody>
+                    <a:bodyPr/>
+                    <a:lstStyle/>
+                    <a:p>
+                      <a:pPr algn="l"/>
+                      <a:r>
+                        <a:rPr sz="950" b="0">
+                          <a:solidFill>
+                            <a:srgbClr val="222A35"/>
+                          </a:solidFill>
+                          <a:latin typeface="Calibri"/>
+                        </a:rPr>
+                        <a:t>nessun legame — altitudine “mascherata”</a:t>
+                      </a:r>
+                    </a:p>
+                  </a:txBody>
+                  <a:tcPr anchor="ctr" marL="64008" marR="64008" marT="9144" marB="9144">
+                    <a:solidFill>
+                      <a:srgbClr val="EEF1F5"/>
+                    </a:solidFill>
+                  </a:tcPr>
+                </a:tc>
+                <a:tc>
+                  <a:txBody>
+                    <a:bodyPr/>
+                    <a:lstStyle/>
+                    <a:p>
+                      <a:pPr algn="ctr"/>
+                      <a:r>
+                        <a:rPr sz="950" b="1">
+                          <a:solidFill>
+                            <a:srgbClr val="1F3A5F"/>
+                          </a:solidFill>
+                          <a:latin typeface="Calibri"/>
+                        </a:rPr>
+                        <a:t>Trascurabile</a:t>
+                      </a:r>
+                    </a:p>
+                  </a:txBody>
+                  <a:tcPr anchor="ctr" marL="64008" marR="64008" marT="9144" marB="9144">
+                    <a:solidFill>
+                      <a:srgbClr val="EEF1F5"/>
+                    </a:solidFill>
+                  </a:tcPr>
+                </a:tc>
+              </a:tr>
+            </a:tbl>
+          </a:graphicData>
+        </a:graphic>
+      </p:graphicFrame>
+      <p:sp>
+        <p:nvSpPr>
+          <p:cNvPr id="20" name="TextBox 19"/>
+          <p:cNvSpPr txBox="1"/>
+          <p:nvPr/>
+        </p:nvSpPr>
+        <p:spPr>
+          <a:xfrm>
+            <a:off x="548640" y="6035040"/>
+            <a:ext cx="11064240" cy="292608"/>
+          </a:xfrm>
+          <a:prstGeom prst="rect">
+            <a:avLst/>
+          </a:prstGeom>
+          <a:noFill/>
+        </p:spPr>
+        <p:txBody>
+          <a:bodyPr wrap="none">
+            <a:spAutoFit/>
+          </a:bodyPr>
+          <a:lstStyle/>
+          <a:p>
+            <a:r>
+              <a:rPr sz="900" i="1">
+                <a:solidFill>
+                  <a:srgbClr val="6B7280"/>
+                </a:solidFill>
+                <a:latin typeface="Calibri"/>
+              </a:rPr>
+              <a:t>Fonti: Kaggle — Ski Resorts &amp; snow.csv  ·  World Bank — PIL pro capite 2022 (US$ correnti)</a:t>
             </a:r>
           </a:p>
         </p:txBody>
